--- a/docs/110122208_PhamTheVinh_Slide_DATN.pptx
+++ b/docs/110122208_PhamTheVinh_Slide_DATN.pptx
@@ -5,22 +5,20 @@
     <p:sldMasterId id="2147483648" r:id="rId1"/>
   </p:sldMasterIdLst>
   <p:notesMasterIdLst>
-    <p:notesMasterId r:id="rId15"/>
+    <p:notesMasterId r:id="rId13"/>
   </p:notesMasterIdLst>
   <p:sldIdLst>
     <p:sldId id="256" r:id="rId2"/>
     <p:sldId id="257" r:id="rId3"/>
-    <p:sldId id="258" r:id="rId4"/>
-    <p:sldId id="259" r:id="rId5"/>
-    <p:sldId id="260" r:id="rId6"/>
-    <p:sldId id="261" r:id="rId7"/>
-    <p:sldId id="262" r:id="rId8"/>
-    <p:sldId id="263" r:id="rId9"/>
-    <p:sldId id="264" r:id="rId10"/>
-    <p:sldId id="265" r:id="rId11"/>
-    <p:sldId id="267" r:id="rId12"/>
-    <p:sldId id="266" r:id="rId13"/>
-    <p:sldId id="268" r:id="rId14"/>
+    <p:sldId id="269" r:id="rId4"/>
+    <p:sldId id="271" r:id="rId5"/>
+    <p:sldId id="258" r:id="rId6"/>
+    <p:sldId id="270" r:id="rId7"/>
+    <p:sldId id="259" r:id="rId8"/>
+    <p:sldId id="264" r:id="rId9"/>
+    <p:sldId id="267" r:id="rId10"/>
+    <p:sldId id="266" r:id="rId11"/>
+    <p:sldId id="268" r:id="rId12"/>
   </p:sldIdLst>
   <p:sldSz cx="12192000" cy="6858000"/>
   <p:notesSz cx="6858000" cy="9144000"/>
@@ -220,7 +218,7 @@
           <a:p>
             <a:fld id="{42E2E3BF-0AEB-42A4-8FF6-AEE881CEA84A}" type="datetimeFigureOut">
               <a:rPr lang="vi-VN" smtClean="0"/>
-              <a:t>29/06/2026</a:t>
+              <a:t>07/07/2026</a:t>
             </a:fld>
             <a:endParaRPr lang="vi-VN"/>
           </a:p>
@@ -619,7 +617,7 @@
           <a:p>
             <a:fld id="{442914FA-AE9A-4CAD-86FB-E2DE0543F47F}" type="datetimeFigureOut">
               <a:rPr lang="vi-VN" smtClean="0"/>
-              <a:t>29/06/2026</a:t>
+              <a:t>07/07/2026</a:t>
             </a:fld>
             <a:endParaRPr lang="vi-VN"/>
           </a:p>
@@ -796,7 +794,7 @@
           <a:p>
             <a:fld id="{442914FA-AE9A-4CAD-86FB-E2DE0543F47F}" type="datetimeFigureOut">
               <a:rPr lang="vi-VN" smtClean="0"/>
-              <a:t>29/06/2026</a:t>
+              <a:t>07/07/2026</a:t>
             </a:fld>
             <a:endParaRPr lang="vi-VN"/>
           </a:p>
@@ -976,7 +974,7 @@
           <a:p>
             <a:fld id="{442914FA-AE9A-4CAD-86FB-E2DE0543F47F}" type="datetimeFigureOut">
               <a:rPr lang="vi-VN" smtClean="0"/>
-              <a:t>29/06/2026</a:t>
+              <a:t>07/07/2026</a:t>
             </a:fld>
             <a:endParaRPr lang="vi-VN"/>
           </a:p>
@@ -1146,7 +1144,7 @@
           <a:p>
             <a:fld id="{442914FA-AE9A-4CAD-86FB-E2DE0543F47F}" type="datetimeFigureOut">
               <a:rPr lang="vi-VN" smtClean="0"/>
-              <a:t>29/06/2026</a:t>
+              <a:t>07/07/2026</a:t>
             </a:fld>
             <a:endParaRPr lang="vi-VN"/>
           </a:p>
@@ -1392,7 +1390,7 @@
           <a:p>
             <a:fld id="{442914FA-AE9A-4CAD-86FB-E2DE0543F47F}" type="datetimeFigureOut">
               <a:rPr lang="vi-VN" smtClean="0"/>
-              <a:t>29/06/2026</a:t>
+              <a:t>07/07/2026</a:t>
             </a:fld>
             <a:endParaRPr lang="vi-VN"/>
           </a:p>
@@ -1624,7 +1622,7 @@
           <a:p>
             <a:fld id="{442914FA-AE9A-4CAD-86FB-E2DE0543F47F}" type="datetimeFigureOut">
               <a:rPr lang="vi-VN" smtClean="0"/>
-              <a:t>29/06/2026</a:t>
+              <a:t>07/07/2026</a:t>
             </a:fld>
             <a:endParaRPr lang="vi-VN"/>
           </a:p>
@@ -1991,7 +1989,7 @@
           <a:p>
             <a:fld id="{442914FA-AE9A-4CAD-86FB-E2DE0543F47F}" type="datetimeFigureOut">
               <a:rPr lang="vi-VN" smtClean="0"/>
-              <a:t>29/06/2026</a:t>
+              <a:t>07/07/2026</a:t>
             </a:fld>
             <a:endParaRPr lang="vi-VN"/>
           </a:p>
@@ -2109,7 +2107,7 @@
           <a:p>
             <a:fld id="{442914FA-AE9A-4CAD-86FB-E2DE0543F47F}" type="datetimeFigureOut">
               <a:rPr lang="vi-VN" smtClean="0"/>
-              <a:t>29/06/2026</a:t>
+              <a:t>07/07/2026</a:t>
             </a:fld>
             <a:endParaRPr lang="vi-VN"/>
           </a:p>
@@ -2204,7 +2202,7 @@
           <a:p>
             <a:fld id="{442914FA-AE9A-4CAD-86FB-E2DE0543F47F}" type="datetimeFigureOut">
               <a:rPr lang="vi-VN" smtClean="0"/>
-              <a:t>29/06/2026</a:t>
+              <a:t>07/07/2026</a:t>
             </a:fld>
             <a:endParaRPr lang="vi-VN"/>
           </a:p>
@@ -2481,7 +2479,7 @@
           <a:p>
             <a:fld id="{442914FA-AE9A-4CAD-86FB-E2DE0543F47F}" type="datetimeFigureOut">
               <a:rPr lang="vi-VN" smtClean="0"/>
-              <a:t>29/06/2026</a:t>
+              <a:t>07/07/2026</a:t>
             </a:fld>
             <a:endParaRPr lang="vi-VN"/>
           </a:p>
@@ -2734,7 +2732,7 @@
           <a:p>
             <a:fld id="{442914FA-AE9A-4CAD-86FB-E2DE0543F47F}" type="datetimeFigureOut">
               <a:rPr lang="vi-VN" smtClean="0"/>
-              <a:t>29/06/2026</a:t>
+              <a:t>07/07/2026</a:t>
             </a:fld>
             <a:endParaRPr lang="vi-VN"/>
           </a:p>
@@ -2947,7 +2945,7 @@
           <a:p>
             <a:fld id="{442914FA-AE9A-4CAD-86FB-E2DE0543F47F}" type="datetimeFigureOut">
               <a:rPr lang="vi-VN" smtClean="0"/>
-              <a:t>29/06/2026</a:t>
+              <a:t>07/07/2026</a:t>
             </a:fld>
             <a:endParaRPr lang="vi-VN"/>
           </a:p>
@@ -3712,8 +3710,8 @@
         </p:nvSpPr>
         <p:spPr>
           <a:xfrm>
-            <a:off x="2106038" y="4604293"/>
-            <a:ext cx="7979923" cy="398834"/>
+            <a:off x="2577019" y="4400005"/>
+            <a:ext cx="7037962" cy="1183664"/>
           </a:xfrm>
           <a:prstGeom prst="rect">
             <a:avLst/>
@@ -3888,15 +3886,91 @@
             </a:lvl9pPr>
           </a:lstStyle>
           <a:p>
-            <a:r>
-              <a:rPr lang="en-US" sz="2000" b="1" smtClean="0">
-                <a:latin typeface="Calibri" panose="020F0502020204030204" pitchFamily="34" charset="0"/>
-                <a:ea typeface="Calibri" panose="020F0502020204030204" pitchFamily="34" charset="0"/>
-                <a:cs typeface="Calibri" panose="020F0502020204030204" pitchFamily="34" charset="0"/>
-              </a:rPr>
-              <a:t>GVHD: TS. Nguyễn Trần Diễm Hạnh		SVTH: Phạm Thế Vinh</a:t>
-            </a:r>
-            <a:endParaRPr lang="vi-VN" sz="2000" b="1">
+            <a:pPr algn="l">
+              <a:lnSpc>
+                <a:spcPct val="100000"/>
+              </a:lnSpc>
+              <a:spcBef>
+                <a:spcPts val="0"/>
+              </a:spcBef>
+            </a:pPr>
+            <a:r>
+              <a:rPr lang="en-US" sz="2000" smtClean="0">
+                <a:latin typeface="Calibri" panose="020F0502020204030204" pitchFamily="34" charset="0"/>
+                <a:ea typeface="Calibri" panose="020F0502020204030204" pitchFamily="34" charset="0"/>
+                <a:cs typeface="Calibri" panose="020F0502020204030204" pitchFamily="34" charset="0"/>
+              </a:rPr>
+              <a:t>GVHD: TS. Nguyễn Trần Diễm Hạnh	</a:t>
+            </a:r>
+            <a:r>
+              <a:rPr lang="en-US" sz="2000" smtClean="0">
+                <a:latin typeface="Calibri" panose="020F0502020204030204" pitchFamily="34" charset="0"/>
+                <a:ea typeface="Calibri" panose="020F0502020204030204" pitchFamily="34" charset="0"/>
+                <a:cs typeface="Calibri" panose="020F0502020204030204" pitchFamily="34" charset="0"/>
+              </a:rPr>
+              <a:t>	SVTH</a:t>
+            </a:r>
+            <a:r>
+              <a:rPr lang="en-US" sz="2000" smtClean="0">
+                <a:latin typeface="Calibri" panose="020F0502020204030204" pitchFamily="34" charset="0"/>
+                <a:ea typeface="Calibri" panose="020F0502020204030204" pitchFamily="34" charset="0"/>
+                <a:cs typeface="Calibri" panose="020F0502020204030204" pitchFamily="34" charset="0"/>
+              </a:rPr>
+              <a:t>: Phạm Thế </a:t>
+            </a:r>
+            <a:r>
+              <a:rPr lang="en-US" sz="2000" smtClean="0">
+                <a:latin typeface="Calibri" panose="020F0502020204030204" pitchFamily="34" charset="0"/>
+                <a:ea typeface="Calibri" panose="020F0502020204030204" pitchFamily="34" charset="0"/>
+                <a:cs typeface="Calibri" panose="020F0502020204030204" pitchFamily="34" charset="0"/>
+              </a:rPr>
+              <a:t>Vinh</a:t>
+            </a:r>
+          </a:p>
+          <a:p>
+            <a:pPr algn="l">
+              <a:lnSpc>
+                <a:spcPct val="100000"/>
+              </a:lnSpc>
+              <a:spcBef>
+                <a:spcPts val="0"/>
+              </a:spcBef>
+            </a:pPr>
+            <a:r>
+              <a:rPr lang="en-US" sz="2000">
+                <a:latin typeface="Calibri" panose="020F0502020204030204" pitchFamily="34" charset="0"/>
+                <a:ea typeface="Calibri" panose="020F0502020204030204" pitchFamily="34" charset="0"/>
+                <a:cs typeface="Calibri" panose="020F0502020204030204" pitchFamily="34" charset="0"/>
+              </a:rPr>
+              <a:t>	</a:t>
+            </a:r>
+            <a:r>
+              <a:rPr lang="en-US" sz="2000" smtClean="0">
+                <a:latin typeface="Calibri" panose="020F0502020204030204" pitchFamily="34" charset="0"/>
+                <a:ea typeface="Calibri" panose="020F0502020204030204" pitchFamily="34" charset="0"/>
+                <a:cs typeface="Calibri" panose="020F0502020204030204" pitchFamily="34" charset="0"/>
+              </a:rPr>
+              <a:t>				Lớp: DA22TTC</a:t>
+            </a:r>
+          </a:p>
+          <a:p>
+            <a:pPr algn="l">
+              <a:lnSpc>
+                <a:spcPct val="100000"/>
+              </a:lnSpc>
+              <a:spcBef>
+                <a:spcPts val="0"/>
+              </a:spcBef>
+            </a:pPr>
+            <a:r>
+              <a:rPr lang="en-US" sz="2000" smtClean="0">
+                <a:latin typeface="Calibri" panose="020F0502020204030204" pitchFamily="34" charset="0"/>
+                <a:ea typeface="Calibri" panose="020F0502020204030204" pitchFamily="34" charset="0"/>
+                <a:cs typeface="Calibri" panose="020F0502020204030204" pitchFamily="34" charset="0"/>
+              </a:rPr>
+              <a:t>					MSSV: 110122208</a:t>
+            </a:r>
+            <a:endParaRPr lang="vi-VN" sz="2000">
               <a:latin typeface="Calibri" panose="020F0502020204030204" pitchFamily="34" charset="0"/>
               <a:ea typeface="Calibri" panose="020F0502020204030204" pitchFamily="34" charset="0"/>
               <a:cs typeface="Calibri" panose="020F0502020204030204" pitchFamily="34" charset="0"/>
@@ -4015,7 +4089,7 @@
                 <a:ea typeface="Calibri" panose="020F0502020204030204" pitchFamily="34" charset="0"/>
                 <a:cs typeface="Calibri" panose="020F0502020204030204" pitchFamily="34" charset="0"/>
               </a:rPr>
-              <a:t>KẾT LUẬN VÀ HƯỚNG PHÁT TRIỂN</a:t>
+              <a:t>Hướng phát triển</a:t>
             </a:r>
             <a:endParaRPr lang="vi-VN" sz="3600" b="1">
               <a:solidFill>
@@ -4049,28 +4123,6 @@
             <a:normAutofit/>
           </a:bodyPr>
           <a:lstStyle/>
-          <a:p>
-            <a:pPr marL="0" indent="0" algn="just">
-              <a:lnSpc>
-                <a:spcPct val="125000"/>
-              </a:lnSpc>
-              <a:spcBef>
-                <a:spcPts val="300"/>
-              </a:spcBef>
-              <a:spcAft>
-                <a:spcPts val="300"/>
-              </a:spcAft>
-              <a:buNone/>
-            </a:pPr>
-            <a:r>
-              <a:rPr lang="vi-VN" sz="2600" b="1" smtClean="0">
-                <a:latin typeface="Calibri" panose="020F0502020204030204" pitchFamily="34" charset="0"/>
-                <a:ea typeface="Calibri" panose="020F0502020204030204" pitchFamily="34" charset="0"/>
-                <a:cs typeface="Calibri" panose="020F0502020204030204" pitchFamily="34" charset="0"/>
-              </a:rPr>
-              <a:t>Kết quả đạt được:</a:t>
-            </a:r>
-          </a:p>
           <a:p>
             <a:pPr algn="just">
               <a:lnSpc>
@@ -4086,28 +4138,20 @@
               <a:buChar char="-"/>
             </a:pPr>
             <a:r>
+              <a:rPr lang="vi-VN" sz="2600" smtClean="0">
+                <a:latin typeface="Calibri" panose="020F0502020204030204" pitchFamily="34" charset="0"/>
+                <a:ea typeface="Calibri" panose="020F0502020204030204" pitchFamily="34" charset="0"/>
+                <a:cs typeface="Calibri" panose="020F0502020204030204" pitchFamily="34" charset="0"/>
+              </a:rPr>
+              <a:t>Nghiên </a:t>
+            </a:r>
+            <a:r>
               <a:rPr lang="vi-VN" sz="2600">
                 <a:latin typeface="Calibri" panose="020F0502020204030204" pitchFamily="34" charset="0"/>
                 <a:ea typeface="Calibri" panose="020F0502020204030204" pitchFamily="34" charset="0"/>
                 <a:cs typeface="Calibri" panose="020F0502020204030204" pitchFamily="34" charset="0"/>
               </a:rPr>
-              <a:t>Hoàn thành website quản lý sáng </a:t>
-            </a:r>
-            <a:r>
-              <a:rPr lang="vi-VN" sz="2600" smtClean="0">
-                <a:latin typeface="Calibri" panose="020F0502020204030204" pitchFamily="34" charset="0"/>
-                <a:ea typeface="Calibri" panose="020F0502020204030204" pitchFamily="34" charset="0"/>
-                <a:cs typeface="Calibri" panose="020F0502020204030204" pitchFamily="34" charset="0"/>
-              </a:rPr>
-              <a:t>kiến với đa </a:t>
-            </a:r>
-            <a:r>
-              <a:rPr lang="vi-VN" sz="2600">
-                <a:latin typeface="Calibri" panose="020F0502020204030204" pitchFamily="34" charset="0"/>
-                <a:ea typeface="Calibri" panose="020F0502020204030204" pitchFamily="34" charset="0"/>
-                <a:cs typeface="Calibri" panose="020F0502020204030204" pitchFamily="34" charset="0"/>
-              </a:rPr>
-              <a:t>cấp quản lý. </a:t>
+              <a:t>cứu áp dụng các mô hình xử lý ngôn ngữ tự nhiên hiện đại hơn.  </a:t>
             </a:r>
           </a:p>
           <a:p>
@@ -4130,13 +4174,8 @@
                 <a:ea typeface="Calibri" panose="020F0502020204030204" pitchFamily="34" charset="0"/>
                 <a:cs typeface="Calibri" panose="020F0502020204030204" pitchFamily="34" charset="0"/>
               </a:rPr>
-              <a:t>Số hóa việc nộp, duyệt hồ sơ và tích hợp biểu đồ thống kê. </a:t>
-            </a:r>
-            <a:endParaRPr lang="vi-VN" sz="2600" smtClean="0">
-              <a:latin typeface="Calibri" panose="020F0502020204030204" pitchFamily="34" charset="0"/>
-              <a:ea typeface="Calibri" panose="020F0502020204030204" pitchFamily="34" charset="0"/>
-              <a:cs typeface="Calibri" panose="020F0502020204030204" pitchFamily="34" charset="0"/>
-            </a:endParaRPr>
+              <a:t>Bổ sung chức năng xuất dữ liệu báo cáo và thống kê chuyên sâu.  </a:t>
+            </a:r>
           </a:p>
           <a:p>
             <a:pPr algn="just">
@@ -4153,35 +4192,12 @@
               <a:buChar char="-"/>
             </a:pPr>
             <a:r>
-              <a:rPr lang="vi-VN" sz="2600" smtClean="0">
-                <a:latin typeface="Calibri" panose="020F0502020204030204" pitchFamily="34" charset="0"/>
-                <a:ea typeface="Calibri" panose="020F0502020204030204" pitchFamily="34" charset="0"/>
-                <a:cs typeface="Calibri" panose="020F0502020204030204" pitchFamily="34" charset="0"/>
-              </a:rPr>
-              <a:t>Tìm hiểu về mô hình ngôn ngữ lớn và tạo dữ liệu bằng AI.</a:t>
-            </a:r>
-          </a:p>
-          <a:p>
-            <a:pPr algn="just">
-              <a:lnSpc>
-                <a:spcPct val="125000"/>
-              </a:lnSpc>
-              <a:spcBef>
-                <a:spcPts val="300"/>
-              </a:spcBef>
-              <a:spcAft>
-                <a:spcPts val="300"/>
-              </a:spcAft>
-              <a:buFont typeface="Sitka Text Semibold" pitchFamily="2" charset="0"/>
-              <a:buChar char="-"/>
-            </a:pPr>
-            <a:r>
-              <a:rPr lang="vi-VN" sz="2600" smtClean="0">
-                <a:latin typeface="Calibri" panose="020F0502020204030204" pitchFamily="34" charset="0"/>
-                <a:ea typeface="Calibri" panose="020F0502020204030204" pitchFamily="34" charset="0"/>
-                <a:cs typeface="Calibri" panose="020F0502020204030204" pitchFamily="34" charset="0"/>
-              </a:rPr>
-              <a:t>Ứng dụng kỹ thuật N-grams hỗ trợ tìm kiếm theo ngữ nghĩa cơ bản.</a:t>
+              <a:rPr lang="vi-VN" sz="2600">
+                <a:latin typeface="Calibri" panose="020F0502020204030204" pitchFamily="34" charset="0"/>
+                <a:ea typeface="Calibri" panose="020F0502020204030204" pitchFamily="34" charset="0"/>
+                <a:cs typeface="Calibri" panose="020F0502020204030204" pitchFamily="34" charset="0"/>
+              </a:rPr>
+              <a:t>Tối ưu hóa câu lệnh truy vấn và nâng cao bảo mật hệ thống.</a:t>
             </a:r>
           </a:p>
         </p:txBody>
@@ -4275,7 +4291,7 @@
     </p:spTree>
     <p:extLst>
       <p:ext uri="{BB962C8B-B14F-4D97-AF65-F5344CB8AC3E}">
-        <p14:creationId xmlns:p14="http://schemas.microsoft.com/office/powerpoint/2010/main" val="2086779073"/>
+        <p14:creationId xmlns:p14="http://schemas.microsoft.com/office/powerpoint/2010/main" val="2251467823"/>
       </p:ext>
     </p:extLst>
   </p:cSld>
@@ -4311,184 +4327,6 @@
       </p:grpSpPr>
       <p:sp>
         <p:nvSpPr>
-          <p:cNvPr id="2" name="Title 1"/>
-          <p:cNvSpPr>
-            <a:spLocks noGrp="1"/>
-          </p:cNvSpPr>
-          <p:nvPr>
-            <p:ph type="title"/>
-          </p:nvPr>
-        </p:nvSpPr>
-        <p:spPr>
-          <a:xfrm>
-            <a:off x="838199" y="472750"/>
-            <a:ext cx="10515600" cy="729574"/>
-          </a:xfrm>
-        </p:spPr>
-        <p:txBody>
-          <a:bodyPr>
-            <a:normAutofit/>
-          </a:bodyPr>
-          <a:lstStyle/>
-          <a:p>
-            <a:r>
-              <a:rPr lang="vi-VN" sz="3600" b="1" smtClean="0">
-                <a:solidFill>
-                  <a:srgbClr val="053484"/>
-                </a:solidFill>
-                <a:latin typeface="Calibri" panose="020F0502020204030204" pitchFamily="34" charset="0"/>
-                <a:ea typeface="Calibri" panose="020F0502020204030204" pitchFamily="34" charset="0"/>
-                <a:cs typeface="Calibri" panose="020F0502020204030204" pitchFamily="34" charset="0"/>
-              </a:rPr>
-              <a:t>KẾT LUẬN VÀ HƯỚNG PHÁT TRIỂN</a:t>
-            </a:r>
-            <a:endParaRPr lang="vi-VN" sz="3600" b="1">
-              <a:solidFill>
-                <a:srgbClr val="053484"/>
-              </a:solidFill>
-              <a:latin typeface="Calibri" panose="020F0502020204030204" pitchFamily="34" charset="0"/>
-              <a:ea typeface="Calibri" panose="020F0502020204030204" pitchFamily="34" charset="0"/>
-              <a:cs typeface="Calibri" panose="020F0502020204030204" pitchFamily="34" charset="0"/>
-            </a:endParaRPr>
-          </a:p>
-        </p:txBody>
-      </p:sp>
-      <p:sp>
-        <p:nvSpPr>
-          <p:cNvPr id="3" name="Content Placeholder 2"/>
-          <p:cNvSpPr>
-            <a:spLocks noGrp="1"/>
-          </p:cNvSpPr>
-          <p:nvPr>
-            <p:ph idx="1"/>
-          </p:nvPr>
-        </p:nvSpPr>
-        <p:spPr>
-          <a:xfrm>
-            <a:off x="838200" y="1446835"/>
-            <a:ext cx="10515600" cy="5231165"/>
-          </a:xfrm>
-        </p:spPr>
-        <p:txBody>
-          <a:bodyPr>
-            <a:normAutofit/>
-          </a:bodyPr>
-          <a:lstStyle/>
-          <a:p>
-            <a:pPr marL="0" indent="0" algn="just">
-              <a:lnSpc>
-                <a:spcPct val="125000"/>
-              </a:lnSpc>
-              <a:spcBef>
-                <a:spcPts val="300"/>
-              </a:spcBef>
-              <a:spcAft>
-                <a:spcPts val="300"/>
-              </a:spcAft>
-              <a:buNone/>
-            </a:pPr>
-            <a:r>
-              <a:rPr lang="vi-VN" sz="2600" b="1" smtClean="0">
-                <a:latin typeface="Calibri" panose="020F0502020204030204" pitchFamily="34" charset="0"/>
-                <a:ea typeface="Calibri" panose="020F0502020204030204" pitchFamily="34" charset="0"/>
-                <a:cs typeface="Calibri" panose="020F0502020204030204" pitchFamily="34" charset="0"/>
-              </a:rPr>
-              <a:t>Hạn chế:</a:t>
-            </a:r>
-          </a:p>
-          <a:p>
-            <a:pPr algn="just">
-              <a:lnSpc>
-                <a:spcPct val="125000"/>
-              </a:lnSpc>
-              <a:spcBef>
-                <a:spcPts val="300"/>
-              </a:spcBef>
-              <a:spcAft>
-                <a:spcPts val="300"/>
-              </a:spcAft>
-              <a:buFont typeface="Sitka Text Semibold" pitchFamily="2" charset="0"/>
-              <a:buChar char="-"/>
-            </a:pPr>
-            <a:r>
-              <a:rPr lang="vi-VN" sz="2600" smtClean="0">
-                <a:latin typeface="Calibri" panose="020F0502020204030204" pitchFamily="34" charset="0"/>
-                <a:ea typeface="Calibri" panose="020F0502020204030204" pitchFamily="34" charset="0"/>
-                <a:cs typeface="Calibri" panose="020F0502020204030204" pitchFamily="34" charset="0"/>
-              </a:rPr>
-              <a:t>Tìm kiếm ngữ nghĩa còn đơn giản, chưa xử lý được các ngữ cảnh phức tạp.</a:t>
-            </a:r>
-          </a:p>
-          <a:p>
-            <a:pPr algn="just">
-              <a:lnSpc>
-                <a:spcPct val="125000"/>
-              </a:lnSpc>
-              <a:spcBef>
-                <a:spcPts val="300"/>
-              </a:spcBef>
-              <a:spcAft>
-                <a:spcPts val="300"/>
-              </a:spcAft>
-              <a:buFont typeface="Sitka Text Semibold" pitchFamily="2" charset="0"/>
-              <a:buChar char="-"/>
-            </a:pPr>
-            <a:r>
-              <a:rPr lang="vi-VN" sz="2600" smtClean="0">
-                <a:latin typeface="Calibri" panose="020F0502020204030204" pitchFamily="34" charset="0"/>
-                <a:ea typeface="Calibri" panose="020F0502020204030204" pitchFamily="34" charset="0"/>
-                <a:cs typeface="Calibri" panose="020F0502020204030204" pitchFamily="34" charset="0"/>
-              </a:rPr>
-              <a:t>Thống kê dừng lại ở mức tổng hợp trực quan, chưa phân tích chuyên sâu.</a:t>
-            </a:r>
-          </a:p>
-        </p:txBody>
-      </p:sp>
-      <p:sp>
-        <p:nvSpPr>
-          <p:cNvPr id="4" name="Rectangle 3"/>
-          <p:cNvSpPr/>
-          <p:nvPr/>
-        </p:nvSpPr>
-        <p:spPr>
-          <a:xfrm>
-            <a:off x="336000" y="1202324"/>
-            <a:ext cx="11520000" cy="72000"/>
-          </a:xfrm>
-          <a:prstGeom prst="rect">
-            <a:avLst/>
-          </a:prstGeom>
-          <a:solidFill>
-            <a:srgbClr val="053484"/>
-          </a:solidFill>
-        </p:spPr>
-        <p:style>
-          <a:lnRef idx="2">
-            <a:schemeClr val="accent1">
-              <a:shade val="50000"/>
-            </a:schemeClr>
-          </a:lnRef>
-          <a:fillRef idx="1">
-            <a:schemeClr val="accent1"/>
-          </a:fillRef>
-          <a:effectRef idx="0">
-            <a:schemeClr val="accent1"/>
-          </a:effectRef>
-          <a:fontRef idx="minor">
-            <a:schemeClr val="lt1"/>
-          </a:fontRef>
-        </p:style>
-        <p:txBody>
-          <a:bodyPr rtlCol="0" anchor="ctr"/>
-          <a:lstStyle/>
-          <a:p>
-            <a:pPr algn="ctr"/>
-            <a:endParaRPr lang="vi-VN"/>
-          </a:p>
-        </p:txBody>
-      </p:sp>
-      <p:sp>
-        <p:nvSpPr>
           <p:cNvPr id="5" name="Rectangle 4"/>
           <p:cNvSpPr/>
           <p:nvPr/>
@@ -4530,367 +4368,6 @@
           </a:p>
         </p:txBody>
       </p:sp>
-    </p:spTree>
-    <p:extLst>
-      <p:ext uri="{BB962C8B-B14F-4D97-AF65-F5344CB8AC3E}">
-        <p14:creationId xmlns:p14="http://schemas.microsoft.com/office/powerpoint/2010/main" val="1171958810"/>
-      </p:ext>
-    </p:extLst>
-  </p:cSld>
-  <p:clrMapOvr>
-    <a:masterClrMapping/>
-  </p:clrMapOvr>
-  <p:timing>
-    <p:tnLst>
-      <p:par>
-        <p:cTn id="1" dur="indefinite" restart="never" nodeType="tmRoot"/>
-      </p:par>
-    </p:tnLst>
-  </p:timing>
-</p:sld>
-</file>
-
-<file path=ppt/slides/slide12.xml><?xml version="1.0" encoding="utf-8"?>
-<p:sld xmlns:a="http://schemas.openxmlformats.org/drawingml/2006/main" xmlns:r="http://schemas.openxmlformats.org/officeDocument/2006/relationships" xmlns:p="http://schemas.openxmlformats.org/presentationml/2006/main">
-  <p:cSld>
-    <p:spTree>
-      <p:nvGrpSpPr>
-        <p:cNvPr id="1" name=""/>
-        <p:cNvGrpSpPr/>
-        <p:nvPr/>
-      </p:nvGrpSpPr>
-      <p:grpSpPr>
-        <a:xfrm>
-          <a:off x="0" y="0"/>
-          <a:ext cx="0" cy="0"/>
-          <a:chOff x="0" y="0"/>
-          <a:chExt cx="0" cy="0"/>
-        </a:xfrm>
-      </p:grpSpPr>
-      <p:sp>
-        <p:nvSpPr>
-          <p:cNvPr id="2" name="Title 1"/>
-          <p:cNvSpPr>
-            <a:spLocks noGrp="1"/>
-          </p:cNvSpPr>
-          <p:nvPr>
-            <p:ph type="title"/>
-          </p:nvPr>
-        </p:nvSpPr>
-        <p:spPr>
-          <a:xfrm>
-            <a:off x="838199" y="472750"/>
-            <a:ext cx="10515600" cy="729574"/>
-          </a:xfrm>
-        </p:spPr>
-        <p:txBody>
-          <a:bodyPr>
-            <a:normAutofit/>
-          </a:bodyPr>
-          <a:lstStyle/>
-          <a:p>
-            <a:r>
-              <a:rPr lang="vi-VN" sz="3600" b="1" smtClean="0">
-                <a:solidFill>
-                  <a:srgbClr val="053484"/>
-                </a:solidFill>
-                <a:latin typeface="Calibri" panose="020F0502020204030204" pitchFamily="34" charset="0"/>
-                <a:ea typeface="Calibri" panose="020F0502020204030204" pitchFamily="34" charset="0"/>
-                <a:cs typeface="Calibri" panose="020F0502020204030204" pitchFamily="34" charset="0"/>
-              </a:rPr>
-              <a:t>KẾT LUẬN VÀ HƯỚNG PHÁT TRIỂN</a:t>
-            </a:r>
-            <a:endParaRPr lang="vi-VN" sz="3600" b="1">
-              <a:solidFill>
-                <a:srgbClr val="053484"/>
-              </a:solidFill>
-              <a:latin typeface="Calibri" panose="020F0502020204030204" pitchFamily="34" charset="0"/>
-              <a:ea typeface="Calibri" panose="020F0502020204030204" pitchFamily="34" charset="0"/>
-              <a:cs typeface="Calibri" panose="020F0502020204030204" pitchFamily="34" charset="0"/>
-            </a:endParaRPr>
-          </a:p>
-        </p:txBody>
-      </p:sp>
-      <p:sp>
-        <p:nvSpPr>
-          <p:cNvPr id="3" name="Content Placeholder 2"/>
-          <p:cNvSpPr>
-            <a:spLocks noGrp="1"/>
-          </p:cNvSpPr>
-          <p:nvPr>
-            <p:ph idx="1"/>
-          </p:nvPr>
-        </p:nvSpPr>
-        <p:spPr>
-          <a:xfrm>
-            <a:off x="838200" y="1446835"/>
-            <a:ext cx="10515600" cy="5231165"/>
-          </a:xfrm>
-        </p:spPr>
-        <p:txBody>
-          <a:bodyPr>
-            <a:normAutofit/>
-          </a:bodyPr>
-          <a:lstStyle/>
-          <a:p>
-            <a:pPr marL="0" indent="0" algn="just">
-              <a:lnSpc>
-                <a:spcPct val="125000"/>
-              </a:lnSpc>
-              <a:spcBef>
-                <a:spcPts val="300"/>
-              </a:spcBef>
-              <a:spcAft>
-                <a:spcPts val="300"/>
-              </a:spcAft>
-              <a:buNone/>
-            </a:pPr>
-            <a:r>
-              <a:rPr lang="vi-VN" sz="2600" b="1" smtClean="0">
-                <a:latin typeface="Calibri" panose="020F0502020204030204" pitchFamily="34" charset="0"/>
-                <a:ea typeface="Calibri" panose="020F0502020204030204" pitchFamily="34" charset="0"/>
-                <a:cs typeface="Calibri" panose="020F0502020204030204" pitchFamily="34" charset="0"/>
-              </a:rPr>
-              <a:t>Hướng phát triển:</a:t>
-            </a:r>
-          </a:p>
-          <a:p>
-            <a:pPr algn="just">
-              <a:lnSpc>
-                <a:spcPct val="125000"/>
-              </a:lnSpc>
-              <a:spcBef>
-                <a:spcPts val="300"/>
-              </a:spcBef>
-              <a:spcAft>
-                <a:spcPts val="300"/>
-              </a:spcAft>
-              <a:buFont typeface="Sitka Text Semibold" pitchFamily="2" charset="0"/>
-              <a:buChar char="-"/>
-            </a:pPr>
-            <a:r>
-              <a:rPr lang="vi-VN" sz="2600">
-                <a:latin typeface="Calibri" panose="020F0502020204030204" pitchFamily="34" charset="0"/>
-                <a:ea typeface="Calibri" panose="020F0502020204030204" pitchFamily="34" charset="0"/>
-                <a:cs typeface="Calibri" panose="020F0502020204030204" pitchFamily="34" charset="0"/>
-              </a:rPr>
-              <a:t>Nghiên cứu áp dụng các mô hình xử lý ngôn ngữ tự nhiên hiện đại hơn.  </a:t>
-            </a:r>
-          </a:p>
-          <a:p>
-            <a:pPr algn="just">
-              <a:lnSpc>
-                <a:spcPct val="125000"/>
-              </a:lnSpc>
-              <a:spcBef>
-                <a:spcPts val="300"/>
-              </a:spcBef>
-              <a:spcAft>
-                <a:spcPts val="300"/>
-              </a:spcAft>
-              <a:buFont typeface="Sitka Text Semibold" pitchFamily="2" charset="0"/>
-              <a:buChar char="-"/>
-            </a:pPr>
-            <a:r>
-              <a:rPr lang="vi-VN" sz="2600">
-                <a:latin typeface="Calibri" panose="020F0502020204030204" pitchFamily="34" charset="0"/>
-                <a:ea typeface="Calibri" panose="020F0502020204030204" pitchFamily="34" charset="0"/>
-                <a:cs typeface="Calibri" panose="020F0502020204030204" pitchFamily="34" charset="0"/>
-              </a:rPr>
-              <a:t>Bổ sung chức năng xuất dữ liệu báo cáo và thống kê chuyên sâu.  </a:t>
-            </a:r>
-          </a:p>
-          <a:p>
-            <a:pPr algn="just">
-              <a:lnSpc>
-                <a:spcPct val="125000"/>
-              </a:lnSpc>
-              <a:spcBef>
-                <a:spcPts val="300"/>
-              </a:spcBef>
-              <a:spcAft>
-                <a:spcPts val="300"/>
-              </a:spcAft>
-              <a:buFont typeface="Sitka Text Semibold" pitchFamily="2" charset="0"/>
-              <a:buChar char="-"/>
-            </a:pPr>
-            <a:r>
-              <a:rPr lang="vi-VN" sz="2600">
-                <a:latin typeface="Calibri" panose="020F0502020204030204" pitchFamily="34" charset="0"/>
-                <a:ea typeface="Calibri" panose="020F0502020204030204" pitchFamily="34" charset="0"/>
-                <a:cs typeface="Calibri" panose="020F0502020204030204" pitchFamily="34" charset="0"/>
-              </a:rPr>
-              <a:t>Tối ưu hóa câu lệnh truy vấn và nâng cao bảo mật hệ thống.</a:t>
-            </a:r>
-          </a:p>
-        </p:txBody>
-      </p:sp>
-      <p:sp>
-        <p:nvSpPr>
-          <p:cNvPr id="4" name="Rectangle 3"/>
-          <p:cNvSpPr/>
-          <p:nvPr/>
-        </p:nvSpPr>
-        <p:spPr>
-          <a:xfrm>
-            <a:off x="336000" y="1202324"/>
-            <a:ext cx="11520000" cy="72000"/>
-          </a:xfrm>
-          <a:prstGeom prst="rect">
-            <a:avLst/>
-          </a:prstGeom>
-          <a:solidFill>
-            <a:srgbClr val="053484"/>
-          </a:solidFill>
-        </p:spPr>
-        <p:style>
-          <a:lnRef idx="2">
-            <a:schemeClr val="accent1">
-              <a:shade val="50000"/>
-            </a:schemeClr>
-          </a:lnRef>
-          <a:fillRef idx="1">
-            <a:schemeClr val="accent1"/>
-          </a:fillRef>
-          <a:effectRef idx="0">
-            <a:schemeClr val="accent1"/>
-          </a:effectRef>
-          <a:fontRef idx="minor">
-            <a:schemeClr val="lt1"/>
-          </a:fontRef>
-        </p:style>
-        <p:txBody>
-          <a:bodyPr rtlCol="0" anchor="ctr"/>
-          <a:lstStyle/>
-          <a:p>
-            <a:pPr algn="ctr"/>
-            <a:endParaRPr lang="vi-VN"/>
-          </a:p>
-        </p:txBody>
-      </p:sp>
-      <p:sp>
-        <p:nvSpPr>
-          <p:cNvPr id="5" name="Rectangle 4"/>
-          <p:cNvSpPr/>
-          <p:nvPr/>
-        </p:nvSpPr>
-        <p:spPr>
-          <a:xfrm>
-            <a:off x="0" y="6678000"/>
-            <a:ext cx="12191999" cy="180000"/>
-          </a:xfrm>
-          <a:prstGeom prst="rect">
-            <a:avLst/>
-          </a:prstGeom>
-          <a:solidFill>
-            <a:srgbClr val="053484"/>
-          </a:solidFill>
-        </p:spPr>
-        <p:style>
-          <a:lnRef idx="2">
-            <a:schemeClr val="accent1">
-              <a:shade val="50000"/>
-            </a:schemeClr>
-          </a:lnRef>
-          <a:fillRef idx="1">
-            <a:schemeClr val="accent1"/>
-          </a:fillRef>
-          <a:effectRef idx="0">
-            <a:schemeClr val="accent1"/>
-          </a:effectRef>
-          <a:fontRef idx="minor">
-            <a:schemeClr val="lt1"/>
-          </a:fontRef>
-        </p:style>
-        <p:txBody>
-          <a:bodyPr rtlCol="0" anchor="ctr"/>
-          <a:lstStyle/>
-          <a:p>
-            <a:pPr algn="ctr"/>
-            <a:endParaRPr lang="vi-VN"/>
-          </a:p>
-        </p:txBody>
-      </p:sp>
-    </p:spTree>
-    <p:extLst>
-      <p:ext uri="{BB962C8B-B14F-4D97-AF65-F5344CB8AC3E}">
-        <p14:creationId xmlns:p14="http://schemas.microsoft.com/office/powerpoint/2010/main" val="2251467823"/>
-      </p:ext>
-    </p:extLst>
-  </p:cSld>
-  <p:clrMapOvr>
-    <a:masterClrMapping/>
-  </p:clrMapOvr>
-  <p:timing>
-    <p:tnLst>
-      <p:par>
-        <p:cTn id="1" dur="indefinite" restart="never" nodeType="tmRoot"/>
-      </p:par>
-    </p:tnLst>
-  </p:timing>
-</p:sld>
-</file>
-
-<file path=ppt/slides/slide13.xml><?xml version="1.0" encoding="utf-8"?>
-<p:sld xmlns:a="http://schemas.openxmlformats.org/drawingml/2006/main" xmlns:r="http://schemas.openxmlformats.org/officeDocument/2006/relationships" xmlns:p="http://schemas.openxmlformats.org/presentationml/2006/main">
-  <p:cSld>
-    <p:spTree>
-      <p:nvGrpSpPr>
-        <p:cNvPr id="1" name=""/>
-        <p:cNvGrpSpPr/>
-        <p:nvPr/>
-      </p:nvGrpSpPr>
-      <p:grpSpPr>
-        <a:xfrm>
-          <a:off x="0" y="0"/>
-          <a:ext cx="0" cy="0"/>
-          <a:chOff x="0" y="0"/>
-          <a:chExt cx="0" cy="0"/>
-        </a:xfrm>
-      </p:grpSpPr>
-      <p:sp>
-        <p:nvSpPr>
-          <p:cNvPr id="5" name="Rectangle 4"/>
-          <p:cNvSpPr/>
-          <p:nvPr/>
-        </p:nvSpPr>
-        <p:spPr>
-          <a:xfrm>
-            <a:off x="0" y="6678000"/>
-            <a:ext cx="12191999" cy="180000"/>
-          </a:xfrm>
-          <a:prstGeom prst="rect">
-            <a:avLst/>
-          </a:prstGeom>
-          <a:solidFill>
-            <a:srgbClr val="053484"/>
-          </a:solidFill>
-        </p:spPr>
-        <p:style>
-          <a:lnRef idx="2">
-            <a:schemeClr val="accent1">
-              <a:shade val="50000"/>
-            </a:schemeClr>
-          </a:lnRef>
-          <a:fillRef idx="1">
-            <a:schemeClr val="accent1"/>
-          </a:fillRef>
-          <a:effectRef idx="0">
-            <a:schemeClr val="accent1"/>
-          </a:effectRef>
-          <a:fontRef idx="minor">
-            <a:schemeClr val="lt1"/>
-          </a:fontRef>
-        </p:style>
-        <p:txBody>
-          <a:bodyPr rtlCol="0" anchor="ctr"/>
-          <a:lstStyle/>
-          <a:p>
-            <a:pPr algn="ctr"/>
-            <a:endParaRPr lang="vi-VN"/>
-          </a:p>
-        </p:txBody>
-      </p:sp>
       <p:sp>
         <p:nvSpPr>
           <p:cNvPr id="6" name="Content Placeholder 5"/>
@@ -4923,29 +4400,7 @@
                 <a:ea typeface="Calibri" panose="020F0502020204030204" pitchFamily="34" charset="0"/>
                 <a:cs typeface="Calibri" panose="020F0502020204030204" pitchFamily="34" charset="0"/>
               </a:rPr>
-              <a:t>XIN CẢM ƠN THẦY CÔ ĐÃ </a:t>
-            </a:r>
-            <a:r>
-              <a:rPr lang="vi-VN" b="1" smtClean="0">
-                <a:solidFill>
-                  <a:srgbClr val="053484"/>
-                </a:solidFill>
-                <a:latin typeface="Calibri" panose="020F0502020204030204" pitchFamily="34" charset="0"/>
-                <a:ea typeface="Calibri" panose="020F0502020204030204" pitchFamily="34" charset="0"/>
-                <a:cs typeface="Calibri" panose="020F0502020204030204" pitchFamily="34" charset="0"/>
-              </a:rPr>
-              <a:t>THEO DÕI BÀI </a:t>
-            </a:r>
-            <a:r>
-              <a:rPr lang="vi-VN" b="1" smtClean="0">
-                <a:solidFill>
-                  <a:srgbClr val="053484"/>
-                </a:solidFill>
-                <a:latin typeface="Calibri" panose="020F0502020204030204" pitchFamily="34" charset="0"/>
-                <a:ea typeface="Calibri" panose="020F0502020204030204" pitchFamily="34" charset="0"/>
-                <a:cs typeface="Calibri" panose="020F0502020204030204" pitchFamily="34" charset="0"/>
-              </a:rPr>
-              <a:t>BÁO CÁO</a:t>
+              <a:t>XIN CẢM ƠN THẦY CÔ ĐÃ THEO DÕI BÀI BÁO CÁO</a:t>
             </a:r>
             <a:endParaRPr lang="vi-VN" b="1">
               <a:solidFill>
@@ -5018,6 +4473,28 @@
           <a:lstStyle/>
           <a:p>
             <a:r>
+              <a:rPr lang="vi-VN" sz="3600" b="1">
+                <a:solidFill>
+                  <a:srgbClr val="053484"/>
+                </a:solidFill>
+                <a:latin typeface="Calibri" panose="020F0502020204030204" pitchFamily="34" charset="0"/>
+                <a:ea typeface="Calibri" panose="020F0502020204030204" pitchFamily="34" charset="0"/>
+                <a:cs typeface="Calibri" panose="020F0502020204030204" pitchFamily="34" charset="0"/>
+              </a:rPr>
+              <a:t>Tính </a:t>
+            </a:r>
+            <a:r>
+              <a:rPr lang="vi-VN" sz="3600" b="1">
+                <a:solidFill>
+                  <a:srgbClr val="053484"/>
+                </a:solidFill>
+                <a:latin typeface="Calibri" panose="020F0502020204030204" pitchFamily="34" charset="0"/>
+                <a:ea typeface="Calibri" panose="020F0502020204030204" pitchFamily="34" charset="0"/>
+                <a:cs typeface="Calibri" panose="020F0502020204030204" pitchFamily="34" charset="0"/>
+              </a:rPr>
+              <a:t>cấp </a:t>
+            </a:r>
+            <a:r>
               <a:rPr lang="vi-VN" sz="3600" b="1" smtClean="0">
                 <a:solidFill>
                   <a:srgbClr val="053484"/>
@@ -5026,7 +4503,7 @@
                 <a:ea typeface="Calibri" panose="020F0502020204030204" pitchFamily="34" charset="0"/>
                 <a:cs typeface="Calibri" panose="020F0502020204030204" pitchFamily="34" charset="0"/>
               </a:rPr>
-              <a:t>GIỚI THIỆU</a:t>
+              <a:t>thiết</a:t>
             </a:r>
             <a:endParaRPr lang="vi-VN" sz="3600" b="1">
               <a:solidFill>
@@ -5060,28 +4537,6 @@
             <a:normAutofit/>
           </a:bodyPr>
           <a:lstStyle/>
-          <a:p>
-            <a:pPr marL="0" indent="0" algn="just">
-              <a:lnSpc>
-                <a:spcPct val="125000"/>
-              </a:lnSpc>
-              <a:spcBef>
-                <a:spcPts val="300"/>
-              </a:spcBef>
-              <a:spcAft>
-                <a:spcPts val="300"/>
-              </a:spcAft>
-              <a:buNone/>
-            </a:pPr>
-            <a:r>
-              <a:rPr lang="vi-VN" sz="2600" b="1" smtClean="0">
-                <a:latin typeface="Calibri" panose="020F0502020204030204" pitchFamily="34" charset="0"/>
-                <a:ea typeface="Calibri" panose="020F0502020204030204" pitchFamily="34" charset="0"/>
-                <a:cs typeface="Calibri" panose="020F0502020204030204" pitchFamily="34" charset="0"/>
-              </a:rPr>
-              <a:t>Tính cấp thiết:</a:t>
-            </a:r>
-          </a:p>
           <a:p>
             <a:pPr algn="just">
               <a:lnSpc>
@@ -5102,7 +4557,39 @@
                 <a:ea typeface="Calibri" panose="020F0502020204030204" pitchFamily="34" charset="0"/>
                 <a:cs typeface="Calibri" panose="020F0502020204030204" pitchFamily="34" charset="0"/>
               </a:rPr>
-              <a:t>Quản lý sáng kiến hiện nay còn thủ công, lưu trữ riêng lẻ, phân tán.  </a:t>
+              <a:t>Phương thức q</a:t>
+            </a:r>
+            <a:r>
+              <a:rPr lang="vi-VN" sz="2600" smtClean="0">
+                <a:latin typeface="Calibri" panose="020F0502020204030204" pitchFamily="34" charset="0"/>
+                <a:ea typeface="Calibri" panose="020F0502020204030204" pitchFamily="34" charset="0"/>
+                <a:cs typeface="Calibri" panose="020F0502020204030204" pitchFamily="34" charset="0"/>
+              </a:rPr>
+              <a:t>uản </a:t>
+            </a:r>
+            <a:r>
+              <a:rPr lang="vi-VN" sz="2600" smtClean="0">
+                <a:latin typeface="Calibri" panose="020F0502020204030204" pitchFamily="34" charset="0"/>
+                <a:ea typeface="Calibri" panose="020F0502020204030204" pitchFamily="34" charset="0"/>
+                <a:cs typeface="Calibri" panose="020F0502020204030204" pitchFamily="34" charset="0"/>
+              </a:rPr>
+              <a:t>lý </a:t>
+            </a:r>
+            <a:r>
+              <a:rPr lang="vi-VN" sz="2600" smtClean="0">
+                <a:latin typeface="Calibri" panose="020F0502020204030204" pitchFamily="34" charset="0"/>
+                <a:ea typeface="Calibri" panose="020F0502020204030204" pitchFamily="34" charset="0"/>
+                <a:cs typeface="Calibri" panose="020F0502020204030204" pitchFamily="34" charset="0"/>
+              </a:rPr>
+              <a:t>còn </a:t>
+            </a:r>
+            <a:r>
+              <a:rPr lang="vi-VN" sz="2600" smtClean="0">
+                <a:latin typeface="Calibri" panose="020F0502020204030204" pitchFamily="34" charset="0"/>
+                <a:ea typeface="Calibri" panose="020F0502020204030204" pitchFamily="34" charset="0"/>
+                <a:cs typeface="Calibri" panose="020F0502020204030204" pitchFamily="34" charset="0"/>
+              </a:rPr>
+              <a:t>thủ công, lưu trữ riêng lẻ, phân tán.  </a:t>
             </a:r>
           </a:p>
           <a:p>
@@ -5150,79 +4637,6 @@
               </a:rPr>
               <a:t>Quy trình xét duyệt, đánh giá qua nhiều giai đoạn, cần số hóa thống nhất.  </a:t>
             </a:r>
-          </a:p>
-          <a:p>
-            <a:pPr marL="0" indent="0" algn="just">
-              <a:lnSpc>
-                <a:spcPct val="125000"/>
-              </a:lnSpc>
-              <a:spcBef>
-                <a:spcPts val="300"/>
-              </a:spcBef>
-              <a:spcAft>
-                <a:spcPts val="300"/>
-              </a:spcAft>
-              <a:buNone/>
-            </a:pPr>
-            <a:r>
-              <a:rPr lang="vi-VN" sz="2600" b="1" smtClean="0">
-                <a:latin typeface="Calibri" panose="020F0502020204030204" pitchFamily="34" charset="0"/>
-                <a:ea typeface="Calibri" panose="020F0502020204030204" pitchFamily="34" charset="0"/>
-                <a:cs typeface="Calibri" panose="020F0502020204030204" pitchFamily="34" charset="0"/>
-              </a:rPr>
-              <a:t>Mục tiêu nghiên cứu:</a:t>
-            </a:r>
-          </a:p>
-          <a:p>
-            <a:pPr algn="just">
-              <a:lnSpc>
-                <a:spcPct val="125000"/>
-              </a:lnSpc>
-              <a:spcBef>
-                <a:spcPts val="300"/>
-              </a:spcBef>
-              <a:spcAft>
-                <a:spcPts val="300"/>
-              </a:spcAft>
-              <a:buFont typeface="Sitka Text Semibold" pitchFamily="2" charset="0"/>
-              <a:buChar char="-"/>
-            </a:pPr>
-            <a:r>
-              <a:rPr lang="vi-VN" sz="2600" smtClean="0">
-                <a:latin typeface="Calibri" panose="020F0502020204030204" pitchFamily="34" charset="0"/>
-                <a:ea typeface="Calibri" panose="020F0502020204030204" pitchFamily="34" charset="0"/>
-                <a:cs typeface="Calibri" panose="020F0502020204030204" pitchFamily="34" charset="0"/>
-              </a:rPr>
-              <a:t>Xây dựng phần mềm quản lý tập trung hồ sơ, tiếp nhận và đánh giá.  </a:t>
-            </a:r>
-          </a:p>
-          <a:p>
-            <a:pPr algn="just">
-              <a:lnSpc>
-                <a:spcPct val="125000"/>
-              </a:lnSpc>
-              <a:spcBef>
-                <a:spcPts val="300"/>
-              </a:spcBef>
-              <a:spcAft>
-                <a:spcPts val="300"/>
-              </a:spcAft>
-              <a:buFont typeface="Sitka Text Semibold" pitchFamily="2" charset="0"/>
-              <a:buChar char="-"/>
-            </a:pPr>
-            <a:r>
-              <a:rPr lang="vi-VN" sz="2600" smtClean="0">
-                <a:latin typeface="Calibri" panose="020F0502020204030204" pitchFamily="34" charset="0"/>
-                <a:ea typeface="Calibri" panose="020F0502020204030204" pitchFamily="34" charset="0"/>
-                <a:cs typeface="Calibri" panose="020F0502020204030204" pitchFamily="34" charset="0"/>
-              </a:rPr>
-              <a:t>Tích hợp chức năng tìm kiếm theo hướng ngữ nghĩa ở mức cơ bản. </a:t>
-            </a:r>
-            <a:endParaRPr lang="vi-VN" sz="2600">
-              <a:latin typeface="Calibri" panose="020F0502020204030204" pitchFamily="34" charset="0"/>
-              <a:ea typeface="Calibri" panose="020F0502020204030204" pitchFamily="34" charset="0"/>
-              <a:cs typeface="Calibri" panose="020F0502020204030204" pitchFamily="34" charset="0"/>
-            </a:endParaRPr>
           </a:p>
         </p:txBody>
       </p:sp>
@@ -5372,6 +4786,28 @@
           <a:lstStyle/>
           <a:p>
             <a:r>
+              <a:rPr lang="vi-VN" sz="3600" b="1">
+                <a:solidFill>
+                  <a:srgbClr val="053484"/>
+                </a:solidFill>
+                <a:latin typeface="Calibri" panose="020F0502020204030204" pitchFamily="34" charset="0"/>
+                <a:ea typeface="Calibri" panose="020F0502020204030204" pitchFamily="34" charset="0"/>
+                <a:cs typeface="Calibri" panose="020F0502020204030204" pitchFamily="34" charset="0"/>
+              </a:rPr>
+              <a:t>Mục tiêu </a:t>
+            </a:r>
+            <a:r>
+              <a:rPr lang="vi-VN" sz="3600" b="1">
+                <a:solidFill>
+                  <a:srgbClr val="053484"/>
+                </a:solidFill>
+                <a:latin typeface="Calibri" panose="020F0502020204030204" pitchFamily="34" charset="0"/>
+                <a:ea typeface="Calibri" panose="020F0502020204030204" pitchFamily="34" charset="0"/>
+                <a:cs typeface="Calibri" panose="020F0502020204030204" pitchFamily="34" charset="0"/>
+              </a:rPr>
+              <a:t>nghiên </a:t>
+            </a:r>
+            <a:r>
               <a:rPr lang="vi-VN" sz="3600" b="1" smtClean="0">
                 <a:solidFill>
                   <a:srgbClr val="053484"/>
@@ -5380,7 +4816,7 @@
                 <a:ea typeface="Calibri" panose="020F0502020204030204" pitchFamily="34" charset="0"/>
                 <a:cs typeface="Calibri" panose="020F0502020204030204" pitchFamily="34" charset="0"/>
               </a:rPr>
-              <a:t>CƠ SỞ LÝ THUYẾT</a:t>
+              <a:t>cứu</a:t>
             </a:r>
             <a:endParaRPr lang="vi-VN" sz="3600" b="1">
               <a:solidFill>
@@ -5434,7 +4870,15 @@
                 <a:ea typeface="Calibri" panose="020F0502020204030204" pitchFamily="34" charset="0"/>
                 <a:cs typeface="Calibri" panose="020F0502020204030204" pitchFamily="34" charset="0"/>
               </a:rPr>
-              <a:t>Quy trình xử lý sáng kiến kinh nghiệm.</a:t>
+              <a:t>Xây </a:t>
+            </a:r>
+            <a:r>
+              <a:rPr lang="vi-VN" sz="2600" smtClean="0">
+                <a:latin typeface="Calibri" panose="020F0502020204030204" pitchFamily="34" charset="0"/>
+                <a:ea typeface="Calibri" panose="020F0502020204030204" pitchFamily="34" charset="0"/>
+                <a:cs typeface="Calibri" panose="020F0502020204030204" pitchFamily="34" charset="0"/>
+              </a:rPr>
+              <a:t>dựng phần mềm quản lý tập trung hồ sơ, tiếp nhận và đánh giá.  </a:t>
             </a:r>
           </a:p>
           <a:p>
@@ -5457,81 +4901,7 @@
                 <a:ea typeface="Calibri" panose="020F0502020204030204" pitchFamily="34" charset="0"/>
                 <a:cs typeface="Calibri" panose="020F0502020204030204" pitchFamily="34" charset="0"/>
               </a:rPr>
-              <a:t>Quy trình xử lý văn bản và tìm kiếm hướng ngữ nghĩa.</a:t>
-            </a:r>
-            <a:endParaRPr lang="vi-VN" sz="2600">
-              <a:latin typeface="Calibri" panose="020F0502020204030204" pitchFamily="34" charset="0"/>
-              <a:ea typeface="Calibri" panose="020F0502020204030204" pitchFamily="34" charset="0"/>
-              <a:cs typeface="Calibri" panose="020F0502020204030204" pitchFamily="34" charset="0"/>
-            </a:endParaRPr>
-          </a:p>
-          <a:p>
-            <a:pPr algn="just">
-              <a:lnSpc>
-                <a:spcPct val="125000"/>
-              </a:lnSpc>
-              <a:spcBef>
-                <a:spcPts val="300"/>
-              </a:spcBef>
-              <a:spcAft>
-                <a:spcPts val="300"/>
-              </a:spcAft>
-              <a:buFont typeface="Sitka Text Semibold" pitchFamily="2" charset="0"/>
-              <a:buChar char="-"/>
-            </a:pPr>
-            <a:r>
-              <a:rPr lang="vi-VN" sz="2600" smtClean="0">
-                <a:latin typeface="Calibri" panose="020F0502020204030204" pitchFamily="34" charset="0"/>
-                <a:ea typeface="Calibri" panose="020F0502020204030204" pitchFamily="34" charset="0"/>
-                <a:cs typeface="Calibri" panose="020F0502020204030204" pitchFamily="34" charset="0"/>
-              </a:rPr>
-              <a:t>Kỹ thuật N-grams.</a:t>
-            </a:r>
-          </a:p>
-          <a:p>
-            <a:pPr algn="just">
-              <a:lnSpc>
-                <a:spcPct val="125000"/>
-              </a:lnSpc>
-              <a:spcBef>
-                <a:spcPts val="300"/>
-              </a:spcBef>
-              <a:spcAft>
-                <a:spcPts val="300"/>
-              </a:spcAft>
-              <a:buFont typeface="Sitka Text Semibold" pitchFamily="2" charset="0"/>
-              <a:buChar char="-"/>
-            </a:pPr>
-            <a:r>
-              <a:rPr lang="vi-VN" sz="2600" smtClean="0">
-                <a:latin typeface="Calibri" panose="020F0502020204030204" pitchFamily="34" charset="0"/>
-                <a:ea typeface="Calibri" panose="020F0502020204030204" pitchFamily="34" charset="0"/>
-                <a:cs typeface="Calibri" panose="020F0502020204030204" pitchFamily="34" charset="0"/>
-              </a:rPr>
-              <a:t>Mô hình ngôn ngữ lớn và Generative AI.</a:t>
-            </a:r>
-          </a:p>
-          <a:p>
-            <a:pPr algn="just">
-              <a:lnSpc>
-                <a:spcPct val="125000"/>
-              </a:lnSpc>
-              <a:spcBef>
-                <a:spcPts val="300"/>
-              </a:spcBef>
-              <a:spcAft>
-                <a:spcPts val="300"/>
-              </a:spcAft>
-              <a:buFont typeface="Sitka Text Semibold" pitchFamily="2" charset="0"/>
-              <a:buChar char="-"/>
-            </a:pPr>
-            <a:r>
-              <a:rPr lang="vi-VN" sz="2600" smtClean="0">
-                <a:latin typeface="Calibri" panose="020F0502020204030204" pitchFamily="34" charset="0"/>
-                <a:ea typeface="Calibri" panose="020F0502020204030204" pitchFamily="34" charset="0"/>
-                <a:cs typeface="Calibri" panose="020F0502020204030204" pitchFamily="34" charset="0"/>
-              </a:rPr>
-              <a:t>Công nghệ: ASP.NET Core MVC, Oracle Database, TailwindCSS &amp; DaisyUI.</a:t>
+              <a:t>Tích hợp chức năng tìm kiếm theo hướng ngữ nghĩa ở mức cơ bản. </a:t>
             </a:r>
             <a:endParaRPr lang="vi-VN" sz="2600">
               <a:latin typeface="Calibri" panose="020F0502020204030204" pitchFamily="34" charset="0"/>
@@ -5630,7 +5000,7 @@
     </p:spTree>
     <p:extLst>
       <p:ext uri="{BB962C8B-B14F-4D97-AF65-F5344CB8AC3E}">
-        <p14:creationId xmlns:p14="http://schemas.microsoft.com/office/powerpoint/2010/main" val="182878306"/>
+        <p14:creationId xmlns:p14="http://schemas.microsoft.com/office/powerpoint/2010/main" val="1261329353"/>
       </p:ext>
     </p:extLst>
   </p:cSld>
@@ -5695,7 +5065,7 @@
                 <a:ea typeface="Calibri" panose="020F0502020204030204" pitchFamily="34" charset="0"/>
                 <a:cs typeface="Calibri" panose="020F0502020204030204" pitchFamily="34" charset="0"/>
               </a:rPr>
-              <a:t>HIỆN THỰC HÓA NGHIÊN CỨU</a:t>
+              <a:t>Nội dung nghiên cứu</a:t>
             </a:r>
             <a:endParaRPr lang="vi-VN" sz="3600" b="1">
               <a:solidFill>
@@ -5729,28 +5099,6 @@
             <a:normAutofit/>
           </a:bodyPr>
           <a:lstStyle/>
-          <a:p>
-            <a:pPr marL="0" indent="0" algn="just">
-              <a:lnSpc>
-                <a:spcPct val="125000"/>
-              </a:lnSpc>
-              <a:spcBef>
-                <a:spcPts val="300"/>
-              </a:spcBef>
-              <a:spcAft>
-                <a:spcPts val="300"/>
-              </a:spcAft>
-              <a:buNone/>
-            </a:pPr>
-            <a:r>
-              <a:rPr lang="vi-VN" sz="2600" b="1" smtClean="0">
-                <a:latin typeface="Calibri" panose="020F0502020204030204" pitchFamily="34" charset="0"/>
-                <a:ea typeface="Calibri" panose="020F0502020204030204" pitchFamily="34" charset="0"/>
-                <a:cs typeface="Calibri" panose="020F0502020204030204" pitchFamily="34" charset="0"/>
-              </a:rPr>
-              <a:t>Chức năng hệ thống:</a:t>
-            </a:r>
-          </a:p>
           <a:p>
             <a:pPr algn="just">
               <a:lnSpc>
@@ -5771,7 +5119,7 @@
                 <a:ea typeface="Calibri" panose="020F0502020204030204" pitchFamily="34" charset="0"/>
                 <a:cs typeface="Calibri" panose="020F0502020204030204" pitchFamily="34" charset="0"/>
               </a:rPr>
-              <a:t>Admin tài khoản: Quản lý tài khoản người dùng </a:t>
+              <a:t>Quy trình xử lý sáng kiến</a:t>
             </a:r>
           </a:p>
           <a:p>
@@ -5794,8 +5142,13 @@
                 <a:ea typeface="Calibri" panose="020F0502020204030204" pitchFamily="34" charset="0"/>
                 <a:cs typeface="Calibri" panose="020F0502020204030204" pitchFamily="34" charset="0"/>
               </a:rPr>
-              <a:t>Ban giám đốc: Quản lý các danh mục chung, hội đồng, xem thống kê.  </a:t>
-            </a:r>
+              <a:t>Kỹ thuật N-grams</a:t>
+            </a:r>
+            <a:endParaRPr lang="vi-VN" sz="2600" smtClean="0">
+              <a:latin typeface="Calibri" panose="020F0502020204030204" pitchFamily="34" charset="0"/>
+              <a:ea typeface="Calibri" panose="020F0502020204030204" pitchFamily="34" charset="0"/>
+              <a:cs typeface="Calibri" panose="020F0502020204030204" pitchFamily="34" charset="0"/>
+            </a:endParaRPr>
           </a:p>
           <a:p>
             <a:pPr algn="just">
@@ -5817,7 +5170,7 @@
                 <a:ea typeface="Calibri" panose="020F0502020204030204" pitchFamily="34" charset="0"/>
                 <a:cs typeface="Calibri" panose="020F0502020204030204" pitchFamily="34" charset="0"/>
               </a:rPr>
-              <a:t>Đơn vị trực thuộc: Tiếp nhận và xét duyệt sáng kiến, xem thống kê nội bộ.  </a:t>
+              <a:t>Xử lý văn bản và tìm kiếm theo hướng ngữ nghĩa</a:t>
             </a:r>
           </a:p>
           <a:p>
@@ -5835,12 +5188,44 @@
               <a:buChar char="-"/>
             </a:pPr>
             <a:r>
+              <a:rPr lang="vi-VN" sz="2600">
+                <a:latin typeface="Calibri" panose="020F0502020204030204" pitchFamily="34" charset="0"/>
+                <a:ea typeface="Calibri" panose="020F0502020204030204" pitchFamily="34" charset="0"/>
+                <a:cs typeface="Calibri" panose="020F0502020204030204" pitchFamily="34" charset="0"/>
+              </a:rPr>
+              <a:t>Nền tảng ASP.NET </a:t>
+            </a:r>
+            <a:r>
+              <a:rPr lang="vi-VN" sz="2600">
+                <a:latin typeface="Calibri" panose="020F0502020204030204" pitchFamily="34" charset="0"/>
+                <a:ea typeface="Calibri" panose="020F0502020204030204" pitchFamily="34" charset="0"/>
+                <a:cs typeface="Calibri" panose="020F0502020204030204" pitchFamily="34" charset="0"/>
+              </a:rPr>
+              <a:t>Core </a:t>
+            </a:r>
+            <a:r>
               <a:rPr lang="vi-VN" sz="2600" smtClean="0">
                 <a:latin typeface="Calibri" panose="020F0502020204030204" pitchFamily="34" charset="0"/>
                 <a:ea typeface="Calibri" panose="020F0502020204030204" pitchFamily="34" charset="0"/>
                 <a:cs typeface="Calibri" panose="020F0502020204030204" pitchFamily="34" charset="0"/>
               </a:rPr>
-              <a:t>Hội đồng: Đánh giá sáng kiến.  </a:t>
+              <a:t>MVC</a:t>
+            </a:r>
+            <a:r>
+              <a:rPr lang="vi-VN" sz="2600">
+                <a:latin typeface="Calibri" panose="020F0502020204030204" pitchFamily="34" charset="0"/>
+                <a:ea typeface="Calibri" panose="020F0502020204030204" pitchFamily="34" charset="0"/>
+                <a:cs typeface="Calibri" panose="020F0502020204030204" pitchFamily="34" charset="0"/>
+              </a:rPr>
+              <a:t> </a:t>
+            </a:r>
+            <a:r>
+              <a:rPr lang="vi-VN" sz="2600" smtClean="0">
+                <a:latin typeface="Calibri" panose="020F0502020204030204" pitchFamily="34" charset="0"/>
+                <a:ea typeface="Calibri" panose="020F0502020204030204" pitchFamily="34" charset="0"/>
+                <a:cs typeface="Calibri" panose="020F0502020204030204" pitchFamily="34" charset="0"/>
+              </a:rPr>
+              <a:t>với ngôn ngữ C#</a:t>
             </a:r>
           </a:p>
           <a:p>
@@ -5863,8 +5248,36 @@
                 <a:ea typeface="Calibri" panose="020F0502020204030204" pitchFamily="34" charset="0"/>
                 <a:cs typeface="Calibri" panose="020F0502020204030204" pitchFamily="34" charset="0"/>
               </a:rPr>
-              <a:t>Cán bộ, giảng viên: Nộp, chỉnh sửa hồ sơ. </a:t>
-            </a:r>
+              <a:t>Hệ quản trị cơ sở dữ Oracle</a:t>
+            </a:r>
+          </a:p>
+          <a:p>
+            <a:pPr algn="just">
+              <a:lnSpc>
+                <a:spcPct val="125000"/>
+              </a:lnSpc>
+              <a:spcBef>
+                <a:spcPts val="300"/>
+              </a:spcBef>
+              <a:spcAft>
+                <a:spcPts val="300"/>
+              </a:spcAft>
+              <a:buFont typeface="Sitka Text Semibold" pitchFamily="2" charset="0"/>
+              <a:buChar char="-"/>
+            </a:pPr>
+            <a:r>
+              <a:rPr lang="vi-VN" sz="2600">
+                <a:latin typeface="Calibri" panose="020F0502020204030204" pitchFamily="34" charset="0"/>
+                <a:ea typeface="Calibri" panose="020F0502020204030204" pitchFamily="34" charset="0"/>
+                <a:cs typeface="Calibri" panose="020F0502020204030204" pitchFamily="34" charset="0"/>
+              </a:rPr>
+              <a:t>Tìm hiểu LLM và Generative AI</a:t>
+            </a:r>
+            <a:endParaRPr lang="vi-VN" sz="2600">
+              <a:latin typeface="Calibri" panose="020F0502020204030204" pitchFamily="34" charset="0"/>
+              <a:ea typeface="Calibri" panose="020F0502020204030204" pitchFamily="34" charset="0"/>
+              <a:cs typeface="Calibri" panose="020F0502020204030204" pitchFamily="34" charset="0"/>
+            </a:endParaRPr>
           </a:p>
         </p:txBody>
       </p:sp>
@@ -5957,7 +5370,7 @@
     </p:spTree>
     <p:extLst>
       <p:ext uri="{BB962C8B-B14F-4D97-AF65-F5344CB8AC3E}">
-        <p14:creationId xmlns:p14="http://schemas.microsoft.com/office/powerpoint/2010/main" val="3492558101"/>
+        <p14:creationId xmlns:p14="http://schemas.microsoft.com/office/powerpoint/2010/main" val="1615783715"/>
       </p:ext>
     </p:extLst>
   </p:cSld>
@@ -6014,6 +5427,28 @@
           <a:lstStyle/>
           <a:p>
             <a:r>
+              <a:rPr lang="vi-VN" sz="3600" b="1">
+                <a:solidFill>
+                  <a:srgbClr val="053484"/>
+                </a:solidFill>
+                <a:latin typeface="Calibri" panose="020F0502020204030204" pitchFamily="34" charset="0"/>
+                <a:ea typeface="Calibri" panose="020F0502020204030204" pitchFamily="34" charset="0"/>
+                <a:cs typeface="Calibri" panose="020F0502020204030204" pitchFamily="34" charset="0"/>
+              </a:rPr>
+              <a:t>Quy </a:t>
+            </a:r>
+            <a:r>
+              <a:rPr lang="vi-VN" sz="3600" b="1">
+                <a:solidFill>
+                  <a:srgbClr val="053484"/>
+                </a:solidFill>
+                <a:latin typeface="Calibri" panose="020F0502020204030204" pitchFamily="34" charset="0"/>
+                <a:ea typeface="Calibri" panose="020F0502020204030204" pitchFamily="34" charset="0"/>
+                <a:cs typeface="Calibri" panose="020F0502020204030204" pitchFamily="34" charset="0"/>
+              </a:rPr>
+              <a:t>trình </a:t>
+            </a:r>
+            <a:r>
               <a:rPr lang="vi-VN" sz="3600" b="1" smtClean="0">
                 <a:solidFill>
                   <a:srgbClr val="053484"/>
@@ -6022,7 +5457,40 @@
                 <a:ea typeface="Calibri" panose="020F0502020204030204" pitchFamily="34" charset="0"/>
                 <a:cs typeface="Calibri" panose="020F0502020204030204" pitchFamily="34" charset="0"/>
               </a:rPr>
-              <a:t>HIỆN THỰC HÓA NGHIÊN CỨU</a:t>
+              <a:t>xử </a:t>
+            </a:r>
+            <a:r>
+              <a:rPr lang="vi-VN" sz="3600" b="1">
+                <a:solidFill>
+                  <a:srgbClr val="053484"/>
+                </a:solidFill>
+                <a:latin typeface="Calibri" panose="020F0502020204030204" pitchFamily="34" charset="0"/>
+                <a:ea typeface="Calibri" panose="020F0502020204030204" pitchFamily="34" charset="0"/>
+                <a:cs typeface="Calibri" panose="020F0502020204030204" pitchFamily="34" charset="0"/>
+              </a:rPr>
+              <a:t>lý </a:t>
+            </a:r>
+            <a:r>
+              <a:rPr lang="vi-VN" sz="3600" b="1">
+                <a:solidFill>
+                  <a:srgbClr val="053484"/>
+                </a:solidFill>
+                <a:latin typeface="Calibri" panose="020F0502020204030204" pitchFamily="34" charset="0"/>
+                <a:ea typeface="Calibri" panose="020F0502020204030204" pitchFamily="34" charset="0"/>
+                <a:cs typeface="Calibri" panose="020F0502020204030204" pitchFamily="34" charset="0"/>
+              </a:rPr>
+              <a:t>sáng </a:t>
+            </a:r>
+            <a:r>
+              <a:rPr lang="vi-VN" sz="3600" b="1" smtClean="0">
+                <a:solidFill>
+                  <a:srgbClr val="053484"/>
+                </a:solidFill>
+                <a:latin typeface="Calibri" panose="020F0502020204030204" pitchFamily="34" charset="0"/>
+                <a:ea typeface="Calibri" panose="020F0502020204030204" pitchFamily="34" charset="0"/>
+                <a:cs typeface="Calibri" panose="020F0502020204030204" pitchFamily="34" charset="0"/>
+              </a:rPr>
+              <a:t>kiến</a:t>
             </a:r>
             <a:endParaRPr lang="vi-VN" sz="3600" b="1">
               <a:solidFill>
@@ -6057,7 +5525,7 @@
           </a:bodyPr>
           <a:lstStyle/>
           <a:p>
-            <a:pPr marL="0" indent="0" algn="just">
+            <a:pPr marL="514350" indent="-514350" algn="just">
               <a:lnSpc>
                 <a:spcPct val="125000"/>
               </a:lnSpc>
@@ -6067,19 +5535,20 @@
               <a:spcAft>
                 <a:spcPts val="300"/>
               </a:spcAft>
-              <a:buNone/>
+              <a:buFont typeface="+mj-lt"/>
+              <a:buAutoNum type="arabicPeriod"/>
             </a:pPr>
             <a:r>
-              <a:rPr lang="vi-VN" sz="2600" b="1" smtClean="0">
-                <a:latin typeface="Calibri" panose="020F0502020204030204" pitchFamily="34" charset="0"/>
-                <a:ea typeface="Calibri" panose="020F0502020204030204" pitchFamily="34" charset="0"/>
-                <a:cs typeface="Calibri" panose="020F0502020204030204" pitchFamily="34" charset="0"/>
-              </a:rPr>
-              <a:t>Sơ đồ use case</a:t>
-            </a:r>
-          </a:p>
-          <a:p>
-            <a:pPr marL="0" indent="0" algn="just">
+              <a:rPr lang="vi-VN" sz="2600" smtClean="0">
+                <a:latin typeface="Calibri" panose="020F0502020204030204" pitchFamily="34" charset="0"/>
+                <a:ea typeface="Calibri" panose="020F0502020204030204" pitchFamily="34" charset="0"/>
+                <a:cs typeface="Calibri" panose="020F0502020204030204" pitchFamily="34" charset="0"/>
+              </a:rPr>
+              <a:t>Nộp sáng kiến</a:t>
+            </a:r>
+          </a:p>
+          <a:p>
+            <a:pPr marL="514350" indent="-514350" algn="just">
               <a:lnSpc>
                 <a:spcPct val="125000"/>
               </a:lnSpc>
@@ -6089,9 +5558,138 @@
               <a:spcAft>
                 <a:spcPts val="300"/>
               </a:spcAft>
-              <a:buNone/>
+              <a:buFont typeface="+mj-lt"/>
+              <a:buAutoNum type="arabicPeriod"/>
             </a:pPr>
+            <a:r>
+              <a:rPr lang="vi-VN" sz="2600" smtClean="0">
+                <a:latin typeface="Calibri" panose="020F0502020204030204" pitchFamily="34" charset="0"/>
+                <a:ea typeface="Calibri" panose="020F0502020204030204" pitchFamily="34" charset="0"/>
+                <a:cs typeface="Calibri" panose="020F0502020204030204" pitchFamily="34" charset="0"/>
+              </a:rPr>
+              <a:t>Tiếp nhận, kiểm tra</a:t>
+            </a:r>
+          </a:p>
+          <a:p>
+            <a:pPr marL="514350" indent="-514350" algn="just">
+              <a:lnSpc>
+                <a:spcPct val="125000"/>
+              </a:lnSpc>
+              <a:spcBef>
+                <a:spcPts val="300"/>
+              </a:spcBef>
+              <a:spcAft>
+                <a:spcPts val="300"/>
+              </a:spcAft>
+              <a:buFont typeface="+mj-lt"/>
+              <a:buAutoNum type="arabicPeriod"/>
+            </a:pPr>
+            <a:r>
+              <a:rPr lang="vi-VN" sz="2600" smtClean="0">
+                <a:latin typeface="Calibri" panose="020F0502020204030204" pitchFamily="34" charset="0"/>
+                <a:ea typeface="Calibri" panose="020F0502020204030204" pitchFamily="34" charset="0"/>
+                <a:cs typeface="Calibri" panose="020F0502020204030204" pitchFamily="34" charset="0"/>
+              </a:rPr>
+              <a:t>Thành lập hội đồng</a:t>
+            </a:r>
             <a:endParaRPr lang="vi-VN" sz="2600" smtClean="0">
+              <a:latin typeface="Calibri" panose="020F0502020204030204" pitchFamily="34" charset="0"/>
+              <a:ea typeface="Calibri" panose="020F0502020204030204" pitchFamily="34" charset="0"/>
+              <a:cs typeface="Calibri" panose="020F0502020204030204" pitchFamily="34" charset="0"/>
+            </a:endParaRPr>
+          </a:p>
+          <a:p>
+            <a:pPr marL="514350" indent="-514350" algn="just">
+              <a:lnSpc>
+                <a:spcPct val="125000"/>
+              </a:lnSpc>
+              <a:spcBef>
+                <a:spcPts val="300"/>
+              </a:spcBef>
+              <a:spcAft>
+                <a:spcPts val="300"/>
+              </a:spcAft>
+              <a:buFont typeface="+mj-lt"/>
+              <a:buAutoNum type="arabicPeriod"/>
+            </a:pPr>
+            <a:r>
+              <a:rPr lang="vi-VN" sz="2600" smtClean="0">
+                <a:latin typeface="Calibri" panose="020F0502020204030204" pitchFamily="34" charset="0"/>
+                <a:ea typeface="Calibri" panose="020F0502020204030204" pitchFamily="34" charset="0"/>
+                <a:cs typeface="Calibri" panose="020F0502020204030204" pitchFamily="34" charset="0"/>
+              </a:rPr>
+              <a:t>Đánh giá</a:t>
+            </a:r>
+          </a:p>
+          <a:p>
+            <a:pPr marL="514350" indent="-514350" algn="just">
+              <a:lnSpc>
+                <a:spcPct val="125000"/>
+              </a:lnSpc>
+              <a:spcBef>
+                <a:spcPts val="300"/>
+              </a:spcBef>
+              <a:spcAft>
+                <a:spcPts val="300"/>
+              </a:spcAft>
+              <a:buFont typeface="+mj-lt"/>
+              <a:buAutoNum type="arabicPeriod"/>
+            </a:pPr>
+            <a:r>
+              <a:rPr lang="vi-VN" sz="2600" smtClean="0">
+                <a:latin typeface="Calibri" panose="020F0502020204030204" pitchFamily="34" charset="0"/>
+                <a:ea typeface="Calibri" panose="020F0502020204030204" pitchFamily="34" charset="0"/>
+                <a:cs typeface="Calibri" panose="020F0502020204030204" pitchFamily="34" charset="0"/>
+              </a:rPr>
+              <a:t>Công bố kết quả</a:t>
+            </a:r>
+          </a:p>
+          <a:p>
+            <a:pPr marL="514350" indent="-514350" algn="just">
+              <a:lnSpc>
+                <a:spcPct val="125000"/>
+              </a:lnSpc>
+              <a:spcBef>
+                <a:spcPts val="300"/>
+              </a:spcBef>
+              <a:spcAft>
+                <a:spcPts val="300"/>
+              </a:spcAft>
+              <a:buFont typeface="+mj-lt"/>
+              <a:buAutoNum type="arabicPeriod"/>
+            </a:pPr>
+            <a:r>
+              <a:rPr lang="vi-VN" sz="2600" smtClean="0">
+                <a:latin typeface="Calibri" panose="020F0502020204030204" pitchFamily="34" charset="0"/>
+                <a:ea typeface="Calibri" panose="020F0502020204030204" pitchFamily="34" charset="0"/>
+                <a:cs typeface="Calibri" panose="020F0502020204030204" pitchFamily="34" charset="0"/>
+              </a:rPr>
+              <a:t>Phúc khảo (nếu có)</a:t>
+            </a:r>
+          </a:p>
+          <a:p>
+            <a:pPr marL="514350" indent="-514350" algn="just">
+              <a:lnSpc>
+                <a:spcPct val="125000"/>
+              </a:lnSpc>
+              <a:spcBef>
+                <a:spcPts val="300"/>
+              </a:spcBef>
+              <a:spcAft>
+                <a:spcPts val="300"/>
+              </a:spcAft>
+              <a:buFont typeface="+mj-lt"/>
+              <a:buAutoNum type="arabicPeriod"/>
+            </a:pPr>
+            <a:r>
+              <a:rPr lang="vi-VN" sz="2600" smtClean="0">
+                <a:latin typeface="Calibri" panose="020F0502020204030204" pitchFamily="34" charset="0"/>
+                <a:ea typeface="Calibri" panose="020F0502020204030204" pitchFamily="34" charset="0"/>
+                <a:cs typeface="Calibri" panose="020F0502020204030204" pitchFamily="34" charset="0"/>
+              </a:rPr>
+              <a:t>Quyết định công nhận</a:t>
+            </a:r>
+            <a:endParaRPr lang="vi-VN" sz="2600">
               <a:latin typeface="Calibri" panose="020F0502020204030204" pitchFamily="34" charset="0"/>
               <a:ea typeface="Calibri" panose="020F0502020204030204" pitchFamily="34" charset="0"/>
               <a:cs typeface="Calibri" panose="020F0502020204030204" pitchFamily="34" charset="0"/>
@@ -6185,76 +5783,10 @@
           </a:p>
         </p:txBody>
       </p:sp>
-      <p:pic>
-        <p:nvPicPr>
-          <p:cNvPr id="7" name="Picture 6"/>
-          <p:cNvPicPr/>
-          <p:nvPr/>
-        </p:nvPicPr>
-        <p:blipFill>
-          <a:blip r:embed="rId2"/>
-          <a:stretch>
-            <a:fillRect/>
-          </a:stretch>
-        </p:blipFill>
-        <p:spPr>
-          <a:xfrm>
-            <a:off x="4441825" y="2622555"/>
-            <a:ext cx="2708910" cy="2159635"/>
-          </a:xfrm>
-          <a:prstGeom prst="rect">
-            <a:avLst/>
-          </a:prstGeom>
-        </p:spPr>
-      </p:pic>
-      <p:pic>
-        <p:nvPicPr>
-          <p:cNvPr id="9" name="Picture 8"/>
-          <p:cNvPicPr/>
-          <p:nvPr/>
-        </p:nvPicPr>
-        <p:blipFill>
-          <a:blip r:embed="rId3"/>
-          <a:stretch>
-            <a:fillRect/>
-          </a:stretch>
-        </p:blipFill>
-        <p:spPr>
-          <a:xfrm>
-            <a:off x="861061" y="2802577"/>
-            <a:ext cx="2750185" cy="1799590"/>
-          </a:xfrm>
-          <a:prstGeom prst="rect">
-            <a:avLst/>
-          </a:prstGeom>
-        </p:spPr>
-      </p:pic>
-      <p:pic>
-        <p:nvPicPr>
-          <p:cNvPr id="10" name="Picture 9"/>
-          <p:cNvPicPr/>
-          <p:nvPr/>
-        </p:nvPicPr>
-        <p:blipFill>
-          <a:blip r:embed="rId4"/>
-          <a:stretch>
-            <a:fillRect/>
-          </a:stretch>
-        </p:blipFill>
-        <p:spPr>
-          <a:xfrm>
-            <a:off x="7867014" y="2262510"/>
-            <a:ext cx="3486785" cy="2879725"/>
-          </a:xfrm>
-          <a:prstGeom prst="rect">
-            <a:avLst/>
-          </a:prstGeom>
-        </p:spPr>
-      </p:pic>
     </p:spTree>
     <p:extLst>
       <p:ext uri="{BB962C8B-B14F-4D97-AF65-F5344CB8AC3E}">
-        <p14:creationId xmlns:p14="http://schemas.microsoft.com/office/powerpoint/2010/main" val="2944773717"/>
+        <p14:creationId xmlns:p14="http://schemas.microsoft.com/office/powerpoint/2010/main" val="182878306"/>
       </p:ext>
     </p:extLst>
   </p:cSld>
@@ -6319,7 +5851,29 @@
                 <a:ea typeface="Calibri" panose="020F0502020204030204" pitchFamily="34" charset="0"/>
                 <a:cs typeface="Calibri" panose="020F0502020204030204" pitchFamily="34" charset="0"/>
               </a:rPr>
-              <a:t>HIỆN THỰC HÓA NGHIÊN CỨU</a:t>
+              <a:t>Xử </a:t>
+            </a:r>
+            <a:r>
+              <a:rPr lang="vi-VN" sz="3600" b="1">
+                <a:solidFill>
+                  <a:srgbClr val="053484"/>
+                </a:solidFill>
+                <a:latin typeface="Calibri" panose="020F0502020204030204" pitchFamily="34" charset="0"/>
+                <a:ea typeface="Calibri" panose="020F0502020204030204" pitchFamily="34" charset="0"/>
+                <a:cs typeface="Calibri" panose="020F0502020204030204" pitchFamily="34" charset="0"/>
+              </a:rPr>
+              <a:t>lý </a:t>
+            </a:r>
+            <a:r>
+              <a:rPr lang="vi-VN" sz="3600" b="1" smtClean="0">
+                <a:solidFill>
+                  <a:srgbClr val="053484"/>
+                </a:solidFill>
+                <a:latin typeface="Calibri" panose="020F0502020204030204" pitchFamily="34" charset="0"/>
+                <a:ea typeface="Calibri" panose="020F0502020204030204" pitchFamily="34" charset="0"/>
+                <a:cs typeface="Calibri" panose="020F0502020204030204" pitchFamily="34" charset="0"/>
+              </a:rPr>
+              <a:t>văn bản và tìm kiếm theo hướng ngữ nghĩa</a:t>
             </a:r>
             <a:endParaRPr lang="vi-VN" sz="3600" b="1">
               <a:solidFill>
@@ -6354,7 +5908,7 @@
           </a:bodyPr>
           <a:lstStyle/>
           <a:p>
-            <a:pPr marL="0" indent="0" algn="just">
+            <a:pPr marL="514350" indent="-514350" algn="just">
               <a:lnSpc>
                 <a:spcPct val="125000"/>
               </a:lnSpc>
@@ -6364,19 +5918,20 @@
               <a:spcAft>
                 <a:spcPts val="300"/>
               </a:spcAft>
-              <a:buNone/>
+              <a:buFont typeface="+mj-lt"/>
+              <a:buAutoNum type="arabicPeriod"/>
             </a:pPr>
             <a:r>
-              <a:rPr lang="vi-VN" sz="2600" b="1" smtClean="0">
-                <a:latin typeface="Calibri" panose="020F0502020204030204" pitchFamily="34" charset="0"/>
-                <a:ea typeface="Calibri" panose="020F0502020204030204" pitchFamily="34" charset="0"/>
-                <a:cs typeface="Calibri" panose="020F0502020204030204" pitchFamily="34" charset="0"/>
-              </a:rPr>
-              <a:t>Sơ đồ use case</a:t>
-            </a:r>
-          </a:p>
-          <a:p>
-            <a:pPr marL="0" indent="0" algn="just">
+              <a:rPr lang="vi-VN" sz="2600" smtClean="0">
+                <a:latin typeface="Calibri" panose="020F0502020204030204" pitchFamily="34" charset="0"/>
+                <a:ea typeface="Calibri" panose="020F0502020204030204" pitchFamily="34" charset="0"/>
+                <a:cs typeface="Calibri" panose="020F0502020204030204" pitchFamily="34" charset="0"/>
+              </a:rPr>
+              <a:t>Tiền xử lý văn bản</a:t>
+            </a:r>
+          </a:p>
+          <a:p>
+            <a:pPr marL="514350" indent="-514350" algn="just">
               <a:lnSpc>
                 <a:spcPct val="125000"/>
               </a:lnSpc>
@@ -6386,9 +5941,133 @@
               <a:spcAft>
                 <a:spcPts val="300"/>
               </a:spcAft>
-              <a:buNone/>
+              <a:buFont typeface="+mj-lt"/>
+              <a:buAutoNum type="arabicPeriod"/>
             </a:pPr>
-            <a:endParaRPr lang="vi-VN" sz="2600" smtClean="0">
+            <a:r>
+              <a:rPr lang="vi-VN" sz="2600" smtClean="0">
+                <a:latin typeface="Calibri" panose="020F0502020204030204" pitchFamily="34" charset="0"/>
+                <a:ea typeface="Calibri" panose="020F0502020204030204" pitchFamily="34" charset="0"/>
+                <a:cs typeface="Calibri" panose="020F0502020204030204" pitchFamily="34" charset="0"/>
+              </a:rPr>
+              <a:t>Sinh cụm từ với N-grams</a:t>
+            </a:r>
+          </a:p>
+          <a:p>
+            <a:pPr marL="514350" indent="-514350" algn="just">
+              <a:lnSpc>
+                <a:spcPct val="125000"/>
+              </a:lnSpc>
+              <a:spcBef>
+                <a:spcPts val="300"/>
+              </a:spcBef>
+              <a:spcAft>
+                <a:spcPts val="300"/>
+              </a:spcAft>
+              <a:buFont typeface="+mj-lt"/>
+              <a:buAutoNum type="arabicPeriod"/>
+            </a:pPr>
+            <a:r>
+              <a:rPr lang="vi-VN" sz="2600" smtClean="0">
+                <a:latin typeface="Calibri" panose="020F0502020204030204" pitchFamily="34" charset="0"/>
+                <a:ea typeface="Calibri" panose="020F0502020204030204" pitchFamily="34" charset="0"/>
+                <a:cs typeface="Calibri" panose="020F0502020204030204" pitchFamily="34" charset="0"/>
+              </a:rPr>
+              <a:t>Lọc cụm từ</a:t>
+            </a:r>
+          </a:p>
+          <a:p>
+            <a:pPr marL="514350" indent="-514350" algn="just">
+              <a:lnSpc>
+                <a:spcPct val="125000"/>
+              </a:lnSpc>
+              <a:spcBef>
+                <a:spcPts val="300"/>
+              </a:spcBef>
+              <a:spcAft>
+                <a:spcPts val="300"/>
+              </a:spcAft>
+              <a:buFont typeface="+mj-lt"/>
+              <a:buAutoNum type="arabicPeriod"/>
+            </a:pPr>
+            <a:r>
+              <a:rPr lang="vi-VN" sz="2600" smtClean="0">
+                <a:latin typeface="Calibri" panose="020F0502020204030204" pitchFamily="34" charset="0"/>
+                <a:ea typeface="Calibri" panose="020F0502020204030204" pitchFamily="34" charset="0"/>
+                <a:cs typeface="Calibri" panose="020F0502020204030204" pitchFamily="34" charset="0"/>
+              </a:rPr>
+              <a:t>Lưu trữ </a:t>
+            </a:r>
+          </a:p>
+          <a:p>
+            <a:pPr marL="514350" indent="-514350" algn="just">
+              <a:lnSpc>
+                <a:spcPct val="125000"/>
+              </a:lnSpc>
+              <a:spcBef>
+                <a:spcPts val="300"/>
+              </a:spcBef>
+              <a:spcAft>
+                <a:spcPts val="300"/>
+              </a:spcAft>
+              <a:buFont typeface="+mj-lt"/>
+              <a:buAutoNum type="arabicPeriod"/>
+            </a:pPr>
+            <a:r>
+              <a:rPr lang="vi-VN" sz="2600" smtClean="0">
+                <a:latin typeface="Calibri" panose="020F0502020204030204" pitchFamily="34" charset="0"/>
+                <a:ea typeface="Calibri" panose="020F0502020204030204" pitchFamily="34" charset="0"/>
+                <a:cs typeface="Calibri" panose="020F0502020204030204" pitchFamily="34" charset="0"/>
+              </a:rPr>
+              <a:t>Xử lý nội dung tìm kiếm</a:t>
+            </a:r>
+          </a:p>
+          <a:p>
+            <a:pPr marL="514350" indent="-514350" algn="just">
+              <a:lnSpc>
+                <a:spcPct val="125000"/>
+              </a:lnSpc>
+              <a:spcBef>
+                <a:spcPts val="300"/>
+              </a:spcBef>
+              <a:spcAft>
+                <a:spcPts val="300"/>
+              </a:spcAft>
+              <a:buFont typeface="+mj-lt"/>
+              <a:buAutoNum type="arabicPeriod"/>
+            </a:pPr>
+            <a:r>
+              <a:rPr lang="vi-VN" sz="2600" smtClean="0">
+                <a:latin typeface="Calibri" panose="020F0502020204030204" pitchFamily="34" charset="0"/>
+                <a:ea typeface="Calibri" panose="020F0502020204030204" pitchFamily="34" charset="0"/>
+                <a:cs typeface="Calibri" panose="020F0502020204030204" pitchFamily="34" charset="0"/>
+              </a:rPr>
+              <a:t>Đối chiếu, xác định mức độ liên quan</a:t>
+            </a:r>
+          </a:p>
+          <a:p>
+            <a:pPr marL="514350" indent="-514350" algn="just">
+              <a:lnSpc>
+                <a:spcPct val="125000"/>
+              </a:lnSpc>
+              <a:spcBef>
+                <a:spcPts val="300"/>
+              </a:spcBef>
+              <a:spcAft>
+                <a:spcPts val="300"/>
+              </a:spcAft>
+              <a:buFont typeface="+mj-lt"/>
+              <a:buAutoNum type="arabicPeriod"/>
+            </a:pPr>
+            <a:r>
+              <a:rPr lang="vi-VN" sz="2600" smtClean="0">
+                <a:latin typeface="Calibri" panose="020F0502020204030204" pitchFamily="34" charset="0"/>
+                <a:ea typeface="Calibri" panose="020F0502020204030204" pitchFamily="34" charset="0"/>
+                <a:cs typeface="Calibri" panose="020F0502020204030204" pitchFamily="34" charset="0"/>
+              </a:rPr>
+              <a:t>Truy xuất kết quả theo xếp hạng</a:t>
+            </a:r>
+            <a:endParaRPr lang="vi-VN" sz="2600">
               <a:latin typeface="Calibri" panose="020F0502020204030204" pitchFamily="34" charset="0"/>
               <a:ea typeface="Calibri" panose="020F0502020204030204" pitchFamily="34" charset="0"/>
               <a:cs typeface="Calibri" panose="020F0502020204030204" pitchFamily="34" charset="0"/>
@@ -6482,68 +6161,10 @@
           </a:p>
         </p:txBody>
       </p:sp>
-      <p:pic>
-        <p:nvPicPr>
-          <p:cNvPr id="9" name="Picture 8"/>
-          <p:cNvPicPr/>
-          <p:nvPr/>
-        </p:nvPicPr>
-        <p:blipFill>
-          <a:blip r:embed="rId2"/>
-          <a:stretch>
-            <a:fillRect/>
-          </a:stretch>
-        </p:blipFill>
-        <p:spPr>
-          <a:xfrm>
-            <a:off x="838199" y="2904807"/>
-            <a:ext cx="3263900" cy="2159635"/>
-          </a:xfrm>
-          <a:prstGeom prst="rect">
-            <a:avLst/>
-          </a:prstGeom>
-        </p:spPr>
-      </p:pic>
-      <p:pic>
-        <p:nvPicPr>
-          <p:cNvPr id="8" name="Picture 7" descr="C:\Users\thevi\Downloads\xxxxxxxxxxxxxxxxxxxxxx (2).png"/>
-          <p:cNvPicPr/>
-          <p:nvPr/>
-        </p:nvPicPr>
-        <p:blipFill rotWithShape="1">
-          <a:blip r:embed="rId3" cstate="print">
-            <a:extLst>
-              <a:ext uri="{28A0092B-C50C-407E-A947-70E740481C1C}">
-                <a14:useLocalDpi xmlns:a14="http://schemas.microsoft.com/office/drawing/2010/main" val="0"/>
-              </a:ext>
-            </a:extLst>
-          </a:blip>
-          <a:srcRect l="18745" t="9671" r="18413" b="15784"/>
-          <a:stretch/>
-        </p:blipFill>
-        <p:spPr bwMode="auto">
-          <a:xfrm>
-            <a:off x="6121270" y="1320624"/>
-            <a:ext cx="3002400" cy="5328000"/>
-          </a:xfrm>
-          <a:prstGeom prst="rect">
-            <a:avLst/>
-          </a:prstGeom>
-          <a:noFill/>
-          <a:ln>
-            <a:noFill/>
-          </a:ln>
-          <a:extLst>
-            <a:ext uri="{53640926-AAD7-44D8-BBD7-CCE9431645EC}">
-              <a14:shadowObscured xmlns:a14="http://schemas.microsoft.com/office/drawing/2010/main"/>
-            </a:ext>
-          </a:extLst>
-        </p:spPr>
-      </p:pic>
     </p:spTree>
     <p:extLst>
       <p:ext uri="{BB962C8B-B14F-4D97-AF65-F5344CB8AC3E}">
-        <p14:creationId xmlns:p14="http://schemas.microsoft.com/office/powerpoint/2010/main" val="57206693"/>
+        <p14:creationId xmlns:p14="http://schemas.microsoft.com/office/powerpoint/2010/main" val="3136115748"/>
       </p:ext>
     </p:extLst>
   </p:cSld>
@@ -6577,42 +6198,6 @@
           <a:chExt cx="0" cy="0"/>
         </a:xfrm>
       </p:grpSpPr>
-      <p:pic>
-        <p:nvPicPr>
-          <p:cNvPr id="8" name="Picture 7" descr="C:\Users\thevi\Downloads\erđatnnew (3).png"/>
-          <p:cNvPicPr/>
-          <p:nvPr/>
-        </p:nvPicPr>
-        <p:blipFill rotWithShape="1">
-          <a:blip r:embed="rId2" cstate="print">
-            <a:extLst>
-              <a:ext uri="{28A0092B-C50C-407E-A947-70E740481C1C}">
-                <a14:useLocalDpi xmlns:a14="http://schemas.microsoft.com/office/drawing/2010/main" val="0"/>
-              </a:ext>
-            </a:extLst>
-          </a:blip>
-          <a:srcRect l="5292" t="21184" r="6789" b="21214"/>
-          <a:stretch/>
-        </p:blipFill>
-        <p:spPr bwMode="auto">
-          <a:xfrm>
-            <a:off x="4651539" y="1308005"/>
-            <a:ext cx="5759450" cy="5335270"/>
-          </a:xfrm>
-          <a:prstGeom prst="rect">
-            <a:avLst/>
-          </a:prstGeom>
-          <a:noFill/>
-          <a:ln>
-            <a:noFill/>
-          </a:ln>
-          <a:extLst>
-            <a:ext uri="{53640926-AAD7-44D8-BBD7-CCE9431645EC}">
-              <a14:shadowObscured xmlns:a14="http://schemas.microsoft.com/office/drawing/2010/main"/>
-            </a:ext>
-          </a:extLst>
-        </p:spPr>
-      </p:pic>
       <p:sp>
         <p:nvSpPr>
           <p:cNvPr id="2" name="Title 1"/>
@@ -6636,6 +6221,28 @@
           <a:lstStyle/>
           <a:p>
             <a:r>
+              <a:rPr lang="vi-VN" sz="3600" b="1">
+                <a:solidFill>
+                  <a:srgbClr val="053484"/>
+                </a:solidFill>
+                <a:latin typeface="Calibri" panose="020F0502020204030204" pitchFamily="34" charset="0"/>
+                <a:ea typeface="Calibri" panose="020F0502020204030204" pitchFamily="34" charset="0"/>
+                <a:cs typeface="Calibri" panose="020F0502020204030204" pitchFamily="34" charset="0"/>
+              </a:rPr>
+              <a:t>Chức năng </a:t>
+            </a:r>
+            <a:r>
+              <a:rPr lang="vi-VN" sz="3600" b="1">
+                <a:solidFill>
+                  <a:srgbClr val="053484"/>
+                </a:solidFill>
+                <a:latin typeface="Calibri" panose="020F0502020204030204" pitchFamily="34" charset="0"/>
+                <a:ea typeface="Calibri" panose="020F0502020204030204" pitchFamily="34" charset="0"/>
+                <a:cs typeface="Calibri" panose="020F0502020204030204" pitchFamily="34" charset="0"/>
+              </a:rPr>
+              <a:t>hệ </a:t>
+            </a:r>
+            <a:r>
               <a:rPr lang="vi-VN" sz="3600" b="1" smtClean="0">
                 <a:solidFill>
                   <a:srgbClr val="053484"/>
@@ -6644,7 +6251,7 @@
                 <a:ea typeface="Calibri" panose="020F0502020204030204" pitchFamily="34" charset="0"/>
                 <a:cs typeface="Calibri" panose="020F0502020204030204" pitchFamily="34" charset="0"/>
               </a:rPr>
-              <a:t>HIỆN THỰC HÓA NGHIÊN CỨU</a:t>
+              <a:t>thống</a:t>
             </a:r>
             <a:endParaRPr lang="vi-VN" sz="3600" b="1">
               <a:solidFill>
@@ -6679,7 +6286,7 @@
           </a:bodyPr>
           <a:lstStyle/>
           <a:p>
-            <a:pPr marL="0" indent="0" algn="just">
+            <a:pPr algn="just">
               <a:lnSpc>
                 <a:spcPct val="125000"/>
               </a:lnSpc>
@@ -6689,15 +6296,148 @@
               <a:spcAft>
                 <a:spcPts val="300"/>
               </a:spcAft>
-              <a:buNone/>
+              <a:buFont typeface="Sitka Text Semibold" pitchFamily="2" charset="0"/>
+              <a:buChar char="-"/>
             </a:pPr>
             <a:r>
-              <a:rPr lang="vi-VN" sz="2600" b="1" smtClean="0">
-                <a:latin typeface="Calibri" panose="020F0502020204030204" pitchFamily="34" charset="0"/>
-                <a:ea typeface="Calibri" panose="020F0502020204030204" pitchFamily="34" charset="0"/>
-                <a:cs typeface="Calibri" panose="020F0502020204030204" pitchFamily="34" charset="0"/>
-              </a:rPr>
-              <a:t>Mô hình thực thể kết hợp</a:t>
+              <a:rPr lang="vi-VN" sz="2600" smtClean="0">
+                <a:latin typeface="Calibri" panose="020F0502020204030204" pitchFamily="34" charset="0"/>
+                <a:ea typeface="Calibri" panose="020F0502020204030204" pitchFamily="34" charset="0"/>
+                <a:cs typeface="Calibri" panose="020F0502020204030204" pitchFamily="34" charset="0"/>
+              </a:rPr>
+              <a:t>Admin </a:t>
+            </a:r>
+            <a:r>
+              <a:rPr lang="vi-VN" sz="2600" smtClean="0">
+                <a:latin typeface="Calibri" panose="020F0502020204030204" pitchFamily="34" charset="0"/>
+                <a:ea typeface="Calibri" panose="020F0502020204030204" pitchFamily="34" charset="0"/>
+                <a:cs typeface="Calibri" panose="020F0502020204030204" pitchFamily="34" charset="0"/>
+              </a:rPr>
+              <a:t>tài khoản: Quản lý tài khoản người dùng </a:t>
+            </a:r>
+          </a:p>
+          <a:p>
+            <a:pPr algn="just">
+              <a:lnSpc>
+                <a:spcPct val="125000"/>
+              </a:lnSpc>
+              <a:spcBef>
+                <a:spcPts val="300"/>
+              </a:spcBef>
+              <a:spcAft>
+                <a:spcPts val="300"/>
+              </a:spcAft>
+              <a:buFont typeface="Sitka Text Semibold" pitchFamily="2" charset="0"/>
+              <a:buChar char="-"/>
+            </a:pPr>
+            <a:r>
+              <a:rPr lang="vi-VN" sz="2600" smtClean="0">
+                <a:latin typeface="Calibri" panose="020F0502020204030204" pitchFamily="34" charset="0"/>
+                <a:ea typeface="Calibri" panose="020F0502020204030204" pitchFamily="34" charset="0"/>
+                <a:cs typeface="Calibri" panose="020F0502020204030204" pitchFamily="34" charset="0"/>
+              </a:rPr>
+              <a:t>Ban giám đốc: Quản lý các danh </a:t>
+            </a:r>
+            <a:r>
+              <a:rPr lang="vi-VN" sz="2600" smtClean="0">
+                <a:latin typeface="Calibri" panose="020F0502020204030204" pitchFamily="34" charset="0"/>
+                <a:ea typeface="Calibri" panose="020F0502020204030204" pitchFamily="34" charset="0"/>
+                <a:cs typeface="Calibri" panose="020F0502020204030204" pitchFamily="34" charset="0"/>
+              </a:rPr>
+              <a:t>mục, sáng kiến, </a:t>
+            </a:r>
+            <a:r>
+              <a:rPr lang="vi-VN" sz="2600" smtClean="0">
+                <a:latin typeface="Calibri" panose="020F0502020204030204" pitchFamily="34" charset="0"/>
+                <a:ea typeface="Calibri" panose="020F0502020204030204" pitchFamily="34" charset="0"/>
+                <a:cs typeface="Calibri" panose="020F0502020204030204" pitchFamily="34" charset="0"/>
+              </a:rPr>
+              <a:t>hội đồng, xem thống kê.  </a:t>
+            </a:r>
+          </a:p>
+          <a:p>
+            <a:pPr algn="just">
+              <a:lnSpc>
+                <a:spcPct val="125000"/>
+              </a:lnSpc>
+              <a:spcBef>
+                <a:spcPts val="300"/>
+              </a:spcBef>
+              <a:spcAft>
+                <a:spcPts val="300"/>
+              </a:spcAft>
+              <a:buFont typeface="Sitka Text Semibold" pitchFamily="2" charset="0"/>
+              <a:buChar char="-"/>
+            </a:pPr>
+            <a:r>
+              <a:rPr lang="vi-VN" sz="2600" smtClean="0">
+                <a:latin typeface="Calibri" panose="020F0502020204030204" pitchFamily="34" charset="0"/>
+                <a:ea typeface="Calibri" panose="020F0502020204030204" pitchFamily="34" charset="0"/>
+                <a:cs typeface="Calibri" panose="020F0502020204030204" pitchFamily="34" charset="0"/>
+              </a:rPr>
+              <a:t>Đơn vị trực thuộc: Tiếp nhận và xét duyệt sáng kiến, xem thống kê nội bộ.  </a:t>
+            </a:r>
+          </a:p>
+          <a:p>
+            <a:pPr algn="just">
+              <a:lnSpc>
+                <a:spcPct val="125000"/>
+              </a:lnSpc>
+              <a:spcBef>
+                <a:spcPts val="300"/>
+              </a:spcBef>
+              <a:spcAft>
+                <a:spcPts val="300"/>
+              </a:spcAft>
+              <a:buFont typeface="Sitka Text Semibold" pitchFamily="2" charset="0"/>
+              <a:buChar char="-"/>
+            </a:pPr>
+            <a:r>
+              <a:rPr lang="vi-VN" sz="2600" smtClean="0">
+                <a:latin typeface="Calibri" panose="020F0502020204030204" pitchFamily="34" charset="0"/>
+                <a:ea typeface="Calibri" panose="020F0502020204030204" pitchFamily="34" charset="0"/>
+                <a:cs typeface="Calibri" panose="020F0502020204030204" pitchFamily="34" charset="0"/>
+              </a:rPr>
+              <a:t>Hội đồng: Đánh </a:t>
+            </a:r>
+            <a:r>
+              <a:rPr lang="vi-VN" sz="2600" smtClean="0">
+                <a:latin typeface="Calibri" panose="020F0502020204030204" pitchFamily="34" charset="0"/>
+                <a:ea typeface="Calibri" panose="020F0502020204030204" pitchFamily="34" charset="0"/>
+                <a:cs typeface="Calibri" panose="020F0502020204030204" pitchFamily="34" charset="0"/>
+              </a:rPr>
+              <a:t>giá sáng </a:t>
+            </a:r>
+            <a:r>
+              <a:rPr lang="vi-VN" sz="2600" smtClean="0">
+                <a:latin typeface="Calibri" panose="020F0502020204030204" pitchFamily="34" charset="0"/>
+                <a:ea typeface="Calibri" panose="020F0502020204030204" pitchFamily="34" charset="0"/>
+                <a:cs typeface="Calibri" panose="020F0502020204030204" pitchFamily="34" charset="0"/>
+              </a:rPr>
+              <a:t>kiến.  </a:t>
+            </a:r>
+          </a:p>
+          <a:p>
+            <a:pPr algn="just">
+              <a:lnSpc>
+                <a:spcPct val="125000"/>
+              </a:lnSpc>
+              <a:spcBef>
+                <a:spcPts val="300"/>
+              </a:spcBef>
+              <a:spcAft>
+                <a:spcPts val="300"/>
+              </a:spcAft>
+              <a:buFont typeface="Sitka Text Semibold" pitchFamily="2" charset="0"/>
+              <a:buChar char="-"/>
+            </a:pPr>
+            <a:r>
+              <a:rPr lang="vi-VN" sz="2600" smtClean="0">
+                <a:latin typeface="Calibri" panose="020F0502020204030204" pitchFamily="34" charset="0"/>
+                <a:ea typeface="Calibri" panose="020F0502020204030204" pitchFamily="34" charset="0"/>
+                <a:cs typeface="Calibri" panose="020F0502020204030204" pitchFamily="34" charset="0"/>
+              </a:rPr>
+              <a:t>Cán bộ, giảng viên: Nộp, chỉnh sửa hồ sơ. </a:t>
             </a:r>
           </a:p>
         </p:txBody>
@@ -6791,7 +6531,7 @@
     </p:spTree>
     <p:extLst>
       <p:ext uri="{BB962C8B-B14F-4D97-AF65-F5344CB8AC3E}">
-        <p14:creationId xmlns:p14="http://schemas.microsoft.com/office/powerpoint/2010/main" val="610943873"/>
+        <p14:creationId xmlns:p14="http://schemas.microsoft.com/office/powerpoint/2010/main" val="3492558101"/>
       </p:ext>
     </p:extLst>
   </p:cSld>
@@ -6856,7 +6596,7 @@
                 <a:ea typeface="Calibri" panose="020F0502020204030204" pitchFamily="34" charset="0"/>
                 <a:cs typeface="Calibri" panose="020F0502020204030204" pitchFamily="34" charset="0"/>
               </a:rPr>
-              <a:t>HIỆN THỰC HÓA NGHIÊN CỨU</a:t>
+              <a:t>Kết quả đạt được</a:t>
             </a:r>
             <a:endParaRPr lang="vi-VN" sz="3600" b="1">
               <a:solidFill>
@@ -6891,7 +6631,7 @@
           </a:bodyPr>
           <a:lstStyle/>
           <a:p>
-            <a:pPr marL="0" indent="0" algn="just">
+            <a:pPr algn="just">
               <a:lnSpc>
                 <a:spcPct val="125000"/>
               </a:lnSpc>
@@ -6901,15 +6641,123 @@
               <a:spcAft>
                 <a:spcPts val="300"/>
               </a:spcAft>
-              <a:buNone/>
+              <a:buFont typeface="Sitka Text Semibold" pitchFamily="2" charset="0"/>
+              <a:buChar char="-"/>
             </a:pPr>
             <a:r>
-              <a:rPr lang="vi-VN" sz="2600" b="1" smtClean="0">
-                <a:latin typeface="Calibri" panose="020F0502020204030204" pitchFamily="34" charset="0"/>
-                <a:ea typeface="Calibri" panose="020F0502020204030204" pitchFamily="34" charset="0"/>
-                <a:cs typeface="Calibri" panose="020F0502020204030204" pitchFamily="34" charset="0"/>
-              </a:rPr>
-              <a:t>Mô hình dữ liệu quan hệ</a:t>
+              <a:rPr lang="vi-VN" sz="2600" smtClean="0">
+                <a:latin typeface="Calibri" panose="020F0502020204030204" pitchFamily="34" charset="0"/>
+                <a:ea typeface="Calibri" panose="020F0502020204030204" pitchFamily="34" charset="0"/>
+                <a:cs typeface="Calibri" panose="020F0502020204030204" pitchFamily="34" charset="0"/>
+              </a:rPr>
+              <a:t>Xây dựng website </a:t>
+            </a:r>
+            <a:r>
+              <a:rPr lang="vi-VN" sz="2600">
+                <a:latin typeface="Calibri" panose="020F0502020204030204" pitchFamily="34" charset="0"/>
+                <a:ea typeface="Calibri" panose="020F0502020204030204" pitchFamily="34" charset="0"/>
+                <a:cs typeface="Calibri" panose="020F0502020204030204" pitchFamily="34" charset="0"/>
+              </a:rPr>
+              <a:t>quản lý sáng </a:t>
+            </a:r>
+            <a:r>
+              <a:rPr lang="vi-VN" sz="2600">
+                <a:latin typeface="Calibri" panose="020F0502020204030204" pitchFamily="34" charset="0"/>
+                <a:ea typeface="Calibri" panose="020F0502020204030204" pitchFamily="34" charset="0"/>
+                <a:cs typeface="Calibri" panose="020F0502020204030204" pitchFamily="34" charset="0"/>
+              </a:rPr>
+              <a:t>kiến </a:t>
+            </a:r>
+            <a:r>
+              <a:rPr lang="vi-VN" sz="2600" smtClean="0">
+                <a:latin typeface="Calibri" panose="020F0502020204030204" pitchFamily="34" charset="0"/>
+                <a:ea typeface="Calibri" panose="020F0502020204030204" pitchFamily="34" charset="0"/>
+                <a:cs typeface="Calibri" panose="020F0502020204030204" pitchFamily="34" charset="0"/>
+              </a:rPr>
+              <a:t>kinh nghiệm. </a:t>
+            </a:r>
+            <a:endParaRPr lang="vi-VN" sz="2600">
+              <a:latin typeface="Calibri" panose="020F0502020204030204" pitchFamily="34" charset="0"/>
+              <a:ea typeface="Calibri" panose="020F0502020204030204" pitchFamily="34" charset="0"/>
+              <a:cs typeface="Calibri" panose="020F0502020204030204" pitchFamily="34" charset="0"/>
+            </a:endParaRPr>
+          </a:p>
+          <a:p>
+            <a:pPr algn="just">
+              <a:lnSpc>
+                <a:spcPct val="125000"/>
+              </a:lnSpc>
+              <a:spcBef>
+                <a:spcPts val="300"/>
+              </a:spcBef>
+              <a:spcAft>
+                <a:spcPts val="300"/>
+              </a:spcAft>
+              <a:buFont typeface="Sitka Text Semibold" pitchFamily="2" charset="0"/>
+              <a:buChar char="-"/>
+            </a:pPr>
+            <a:r>
+              <a:rPr lang="vi-VN" sz="2600" smtClean="0">
+                <a:latin typeface="Calibri" panose="020F0502020204030204" pitchFamily="34" charset="0"/>
+                <a:ea typeface="Calibri" panose="020F0502020204030204" pitchFamily="34" charset="0"/>
+                <a:cs typeface="Calibri" panose="020F0502020204030204" pitchFamily="34" charset="0"/>
+              </a:rPr>
+              <a:t>Tìm </a:t>
+            </a:r>
+            <a:r>
+              <a:rPr lang="vi-VN" sz="2600">
+                <a:latin typeface="Calibri" panose="020F0502020204030204" pitchFamily="34" charset="0"/>
+                <a:ea typeface="Calibri" panose="020F0502020204030204" pitchFamily="34" charset="0"/>
+                <a:cs typeface="Calibri" panose="020F0502020204030204" pitchFamily="34" charset="0"/>
+              </a:rPr>
+              <a:t>hiểu về mô hình ngôn ngữ lớn và tạo dữ liệu bằng AI.</a:t>
+            </a:r>
+          </a:p>
+          <a:p>
+            <a:pPr algn="just">
+              <a:lnSpc>
+                <a:spcPct val="125000"/>
+              </a:lnSpc>
+              <a:spcBef>
+                <a:spcPts val="300"/>
+              </a:spcBef>
+              <a:spcAft>
+                <a:spcPts val="300"/>
+              </a:spcAft>
+              <a:buFont typeface="Sitka Text Semibold" pitchFamily="2" charset="0"/>
+              <a:buChar char="-"/>
+            </a:pPr>
+            <a:r>
+              <a:rPr lang="vi-VN" sz="2600">
+                <a:latin typeface="Calibri" panose="020F0502020204030204" pitchFamily="34" charset="0"/>
+                <a:ea typeface="Calibri" panose="020F0502020204030204" pitchFamily="34" charset="0"/>
+                <a:cs typeface="Calibri" panose="020F0502020204030204" pitchFamily="34" charset="0"/>
+              </a:rPr>
+              <a:t>Ứng dụng kỹ thuật N-grams hỗ trợ tìm kiếm </a:t>
+            </a:r>
+            <a:r>
+              <a:rPr lang="vi-VN" sz="2600">
+                <a:latin typeface="Calibri" panose="020F0502020204030204" pitchFamily="34" charset="0"/>
+                <a:ea typeface="Calibri" panose="020F0502020204030204" pitchFamily="34" charset="0"/>
+                <a:cs typeface="Calibri" panose="020F0502020204030204" pitchFamily="34" charset="0"/>
+              </a:rPr>
+              <a:t>theo </a:t>
+            </a:r>
+            <a:r>
+              <a:rPr lang="vi-VN" sz="2600" smtClean="0">
+                <a:latin typeface="Calibri" panose="020F0502020204030204" pitchFamily="34" charset="0"/>
+                <a:ea typeface="Calibri" panose="020F0502020204030204" pitchFamily="34" charset="0"/>
+                <a:cs typeface="Calibri" panose="020F0502020204030204" pitchFamily="34" charset="0"/>
+              </a:rPr>
+              <a:t>hướng ngữ </a:t>
+            </a:r>
+            <a:r>
+              <a:rPr lang="vi-VN" sz="2600">
+                <a:latin typeface="Calibri" panose="020F0502020204030204" pitchFamily="34" charset="0"/>
+                <a:ea typeface="Calibri" panose="020F0502020204030204" pitchFamily="34" charset="0"/>
+                <a:cs typeface="Calibri" panose="020F0502020204030204" pitchFamily="34" charset="0"/>
+              </a:rPr>
+              <a:t>nghĩa cơ bản.</a:t>
             </a:r>
           </a:p>
         </p:txBody>
@@ -7000,46 +6848,10 @@
           </a:p>
         </p:txBody>
       </p:sp>
-      <p:pic>
-        <p:nvPicPr>
-          <p:cNvPr id="7" name="Picture 6" descr="C:\Users\thevi\Downloads\qhqhqhq.png"/>
-          <p:cNvPicPr/>
-          <p:nvPr/>
-        </p:nvPicPr>
-        <p:blipFill rotWithShape="1">
-          <a:blip r:embed="rId2" cstate="print">
-            <a:extLst>
-              <a:ext uri="{28A0092B-C50C-407E-A947-70E740481C1C}">
-                <a14:useLocalDpi xmlns:a14="http://schemas.microsoft.com/office/drawing/2010/main" val="0"/>
-              </a:ext>
-            </a:extLst>
-          </a:blip>
-          <a:srcRect l="5053" t="21184" r="6411" b="21312"/>
-          <a:stretch/>
-        </p:blipFill>
-        <p:spPr bwMode="auto">
-          <a:xfrm>
-            <a:off x="4628389" y="1328660"/>
-            <a:ext cx="5759450" cy="5288915"/>
-          </a:xfrm>
-          <a:prstGeom prst="rect">
-            <a:avLst/>
-          </a:prstGeom>
-          <a:noFill/>
-          <a:ln>
-            <a:noFill/>
-          </a:ln>
-          <a:extLst>
-            <a:ext uri="{53640926-AAD7-44D8-BBD7-CCE9431645EC}">
-              <a14:shadowObscured xmlns:a14="http://schemas.microsoft.com/office/drawing/2010/main"/>
-            </a:ext>
-          </a:extLst>
-        </p:spPr>
-      </p:pic>
     </p:spTree>
     <p:extLst>
       <p:ext uri="{BB962C8B-B14F-4D97-AF65-F5344CB8AC3E}">
-        <p14:creationId xmlns:p14="http://schemas.microsoft.com/office/powerpoint/2010/main" val="3280768139"/>
+        <p14:creationId xmlns:p14="http://schemas.microsoft.com/office/powerpoint/2010/main" val="2721326689"/>
       </p:ext>
     </p:extLst>
   </p:cSld>
@@ -7104,7 +6916,7 @@
                 <a:ea typeface="Calibri" panose="020F0502020204030204" pitchFamily="34" charset="0"/>
                 <a:cs typeface="Calibri" panose="020F0502020204030204" pitchFamily="34" charset="0"/>
               </a:rPr>
-              <a:t>KẾT QUẢ NGHIÊN CỨU</a:t>
+              <a:t>Hạn chế</a:t>
             </a:r>
             <a:endParaRPr lang="vi-VN" sz="3600" b="1">
               <a:solidFill>
@@ -7153,12 +6965,20 @@
               <a:buChar char="-"/>
             </a:pPr>
             <a:r>
-              <a:rPr lang="vi-VN" sz="2600">
-                <a:latin typeface="Calibri" panose="020F0502020204030204" pitchFamily="34" charset="0"/>
-                <a:ea typeface="Calibri" panose="020F0502020204030204" pitchFamily="34" charset="0"/>
-                <a:cs typeface="Calibri" panose="020F0502020204030204" pitchFamily="34" charset="0"/>
-              </a:rPr>
-              <a:t>Xây dựng thành công website quản lý sáng kiến kinh nghiệm với các chức năng phù hợp với yêu cầu đặt ra.</a:t>
+              <a:rPr lang="vi-VN" sz="2600" smtClean="0">
+                <a:latin typeface="Calibri" panose="020F0502020204030204" pitchFamily="34" charset="0"/>
+                <a:ea typeface="Calibri" panose="020F0502020204030204" pitchFamily="34" charset="0"/>
+                <a:cs typeface="Calibri" panose="020F0502020204030204" pitchFamily="34" charset="0"/>
+              </a:rPr>
+              <a:t>Tìm </a:t>
+            </a:r>
+            <a:r>
+              <a:rPr lang="vi-VN" sz="2600" smtClean="0">
+                <a:latin typeface="Calibri" panose="020F0502020204030204" pitchFamily="34" charset="0"/>
+                <a:ea typeface="Calibri" panose="020F0502020204030204" pitchFamily="34" charset="0"/>
+                <a:cs typeface="Calibri" panose="020F0502020204030204" pitchFamily="34" charset="0"/>
+              </a:rPr>
+              <a:t>kiếm ngữ nghĩa còn đơn giản, chưa xử lý được các ngữ cảnh phức tạp.</a:t>
             </a:r>
           </a:p>
           <a:p>
@@ -7176,43 +6996,12 @@
               <a:buChar char="-"/>
             </a:pPr>
             <a:r>
-              <a:rPr lang="vi-VN" sz="2600">
-                <a:latin typeface="Calibri" panose="020F0502020204030204" pitchFamily="34" charset="0"/>
-                <a:ea typeface="Calibri" panose="020F0502020204030204" pitchFamily="34" charset="0"/>
-                <a:cs typeface="Calibri" panose="020F0502020204030204" pitchFamily="34" charset="0"/>
-              </a:rPr>
-              <a:t>Kết nối API với mô hình trí tuệ nhân tạo để tạo dữ liệu cho hệ thống.</a:t>
-            </a:r>
-          </a:p>
-          <a:p>
-            <a:pPr algn="just">
-              <a:lnSpc>
-                <a:spcPct val="125000"/>
-              </a:lnSpc>
-              <a:spcBef>
-                <a:spcPts val="300"/>
-              </a:spcBef>
-              <a:spcAft>
-                <a:spcPts val="300"/>
-              </a:spcAft>
-              <a:buFont typeface="Sitka Text Semibold" pitchFamily="2" charset="0"/>
-              <a:buChar char="-"/>
-            </a:pPr>
-            <a:r>
-              <a:rPr lang="vi-VN" sz="2600">
-                <a:latin typeface="Calibri" panose="020F0502020204030204" pitchFamily="34" charset="0"/>
-                <a:ea typeface="Calibri" panose="020F0502020204030204" pitchFamily="34" charset="0"/>
-                <a:cs typeface="Calibri" panose="020F0502020204030204" pitchFamily="34" charset="0"/>
-              </a:rPr>
-              <a:t>Tích hợp thành công chức năng tìm kiếm hướng ngữ nghĩa nhờ vận dụng kỹ thuật N-grams</a:t>
-            </a:r>
-            <a:r>
               <a:rPr lang="vi-VN" sz="2600" smtClean="0">
                 <a:latin typeface="Calibri" panose="020F0502020204030204" pitchFamily="34" charset="0"/>
                 <a:ea typeface="Calibri" panose="020F0502020204030204" pitchFamily="34" charset="0"/>
                 <a:cs typeface="Calibri" panose="020F0502020204030204" pitchFamily="34" charset="0"/>
               </a:rPr>
-              <a:t>.</a:t>
+              <a:t>Thống kê dừng lại ở mức tổng hợp trực quan, chưa phân tích chuyên sâu.</a:t>
             </a:r>
           </a:p>
         </p:txBody>
@@ -7306,7 +7095,7 @@
     </p:spTree>
     <p:extLst>
       <p:ext uri="{BB962C8B-B14F-4D97-AF65-F5344CB8AC3E}">
-        <p14:creationId xmlns:p14="http://schemas.microsoft.com/office/powerpoint/2010/main" val="2721326689"/>
+        <p14:creationId xmlns:p14="http://schemas.microsoft.com/office/powerpoint/2010/main" val="1171958810"/>
       </p:ext>
     </p:extLst>
   </p:cSld>

--- a/docs/110122208_PhamTheVinh_Slide_DATN.pptx
+++ b/docs/110122208_PhamTheVinh_Slide_DATN.pptx
@@ -218,7 +218,7 @@
           <a:p>
             <a:fld id="{42E2E3BF-0AEB-42A4-8FF6-AEE881CEA84A}" type="datetimeFigureOut">
               <a:rPr lang="vi-VN" smtClean="0"/>
-              <a:t>07/07/2026</a:t>
+              <a:t>08/07/2026</a:t>
             </a:fld>
             <a:endParaRPr lang="vi-VN"/>
           </a:p>
@@ -617,7 +617,7 @@
           <a:p>
             <a:fld id="{442914FA-AE9A-4CAD-86FB-E2DE0543F47F}" type="datetimeFigureOut">
               <a:rPr lang="vi-VN" smtClean="0"/>
-              <a:t>07/07/2026</a:t>
+              <a:t>08/07/2026</a:t>
             </a:fld>
             <a:endParaRPr lang="vi-VN"/>
           </a:p>
@@ -794,7 +794,7 @@
           <a:p>
             <a:fld id="{442914FA-AE9A-4CAD-86FB-E2DE0543F47F}" type="datetimeFigureOut">
               <a:rPr lang="vi-VN" smtClean="0"/>
-              <a:t>07/07/2026</a:t>
+              <a:t>08/07/2026</a:t>
             </a:fld>
             <a:endParaRPr lang="vi-VN"/>
           </a:p>
@@ -974,7 +974,7 @@
           <a:p>
             <a:fld id="{442914FA-AE9A-4CAD-86FB-E2DE0543F47F}" type="datetimeFigureOut">
               <a:rPr lang="vi-VN" smtClean="0"/>
-              <a:t>07/07/2026</a:t>
+              <a:t>08/07/2026</a:t>
             </a:fld>
             <a:endParaRPr lang="vi-VN"/>
           </a:p>
@@ -1144,7 +1144,7 @@
           <a:p>
             <a:fld id="{442914FA-AE9A-4CAD-86FB-E2DE0543F47F}" type="datetimeFigureOut">
               <a:rPr lang="vi-VN" smtClean="0"/>
-              <a:t>07/07/2026</a:t>
+              <a:t>08/07/2026</a:t>
             </a:fld>
             <a:endParaRPr lang="vi-VN"/>
           </a:p>
@@ -1390,7 +1390,7 @@
           <a:p>
             <a:fld id="{442914FA-AE9A-4CAD-86FB-E2DE0543F47F}" type="datetimeFigureOut">
               <a:rPr lang="vi-VN" smtClean="0"/>
-              <a:t>07/07/2026</a:t>
+              <a:t>08/07/2026</a:t>
             </a:fld>
             <a:endParaRPr lang="vi-VN"/>
           </a:p>
@@ -1622,7 +1622,7 @@
           <a:p>
             <a:fld id="{442914FA-AE9A-4CAD-86FB-E2DE0543F47F}" type="datetimeFigureOut">
               <a:rPr lang="vi-VN" smtClean="0"/>
-              <a:t>07/07/2026</a:t>
+              <a:t>08/07/2026</a:t>
             </a:fld>
             <a:endParaRPr lang="vi-VN"/>
           </a:p>
@@ -1989,7 +1989,7 @@
           <a:p>
             <a:fld id="{442914FA-AE9A-4CAD-86FB-E2DE0543F47F}" type="datetimeFigureOut">
               <a:rPr lang="vi-VN" smtClean="0"/>
-              <a:t>07/07/2026</a:t>
+              <a:t>08/07/2026</a:t>
             </a:fld>
             <a:endParaRPr lang="vi-VN"/>
           </a:p>
@@ -2107,7 +2107,7 @@
           <a:p>
             <a:fld id="{442914FA-AE9A-4CAD-86FB-E2DE0543F47F}" type="datetimeFigureOut">
               <a:rPr lang="vi-VN" smtClean="0"/>
-              <a:t>07/07/2026</a:t>
+              <a:t>08/07/2026</a:t>
             </a:fld>
             <a:endParaRPr lang="vi-VN"/>
           </a:p>
@@ -2202,7 +2202,7 @@
           <a:p>
             <a:fld id="{442914FA-AE9A-4CAD-86FB-E2DE0543F47F}" type="datetimeFigureOut">
               <a:rPr lang="vi-VN" smtClean="0"/>
-              <a:t>07/07/2026</a:t>
+              <a:t>08/07/2026</a:t>
             </a:fld>
             <a:endParaRPr lang="vi-VN"/>
           </a:p>
@@ -2479,7 +2479,7 @@
           <a:p>
             <a:fld id="{442914FA-AE9A-4CAD-86FB-E2DE0543F47F}" type="datetimeFigureOut">
               <a:rPr lang="vi-VN" smtClean="0"/>
-              <a:t>07/07/2026</a:t>
+              <a:t>08/07/2026</a:t>
             </a:fld>
             <a:endParaRPr lang="vi-VN"/>
           </a:p>
@@ -2732,7 +2732,7 @@
           <a:p>
             <a:fld id="{442914FA-AE9A-4CAD-86FB-E2DE0543F47F}" type="datetimeFigureOut">
               <a:rPr lang="vi-VN" smtClean="0"/>
-              <a:t>07/07/2026</a:t>
+              <a:t>08/07/2026</a:t>
             </a:fld>
             <a:endParaRPr lang="vi-VN"/>
           </a:p>
@@ -2945,7 +2945,7 @@
           <a:p>
             <a:fld id="{442914FA-AE9A-4CAD-86FB-E2DE0543F47F}" type="datetimeFigureOut">
               <a:rPr lang="vi-VN" smtClean="0"/>
-              <a:t>07/07/2026</a:t>
+              <a:t>08/07/2026</a:t>
             </a:fld>
             <a:endParaRPr lang="vi-VN"/>
           </a:p>
@@ -3900,31 +3900,7 @@
                 <a:ea typeface="Calibri" panose="020F0502020204030204" pitchFamily="34" charset="0"/>
                 <a:cs typeface="Calibri" panose="020F0502020204030204" pitchFamily="34" charset="0"/>
               </a:rPr>
-              <a:t>GVHD: TS. Nguyễn Trần Diễm Hạnh	</a:t>
-            </a:r>
-            <a:r>
-              <a:rPr lang="en-US" sz="2000" smtClean="0">
-                <a:latin typeface="Calibri" panose="020F0502020204030204" pitchFamily="34" charset="0"/>
-                <a:ea typeface="Calibri" panose="020F0502020204030204" pitchFamily="34" charset="0"/>
-                <a:cs typeface="Calibri" panose="020F0502020204030204" pitchFamily="34" charset="0"/>
-              </a:rPr>
-              <a:t>	SVTH</a:t>
-            </a:r>
-            <a:r>
-              <a:rPr lang="en-US" sz="2000" smtClean="0">
-                <a:latin typeface="Calibri" panose="020F0502020204030204" pitchFamily="34" charset="0"/>
-                <a:ea typeface="Calibri" panose="020F0502020204030204" pitchFamily="34" charset="0"/>
-                <a:cs typeface="Calibri" panose="020F0502020204030204" pitchFamily="34" charset="0"/>
-              </a:rPr>
-              <a:t>: Phạm Thế </a:t>
-            </a:r>
-            <a:r>
-              <a:rPr lang="en-US" sz="2000" smtClean="0">
-                <a:latin typeface="Calibri" panose="020F0502020204030204" pitchFamily="34" charset="0"/>
-                <a:ea typeface="Calibri" panose="020F0502020204030204" pitchFamily="34" charset="0"/>
-                <a:cs typeface="Calibri" panose="020F0502020204030204" pitchFamily="34" charset="0"/>
-              </a:rPr>
-              <a:t>Vinh</a:t>
+              <a:t>GVHD: TS. Nguyễn Trần Diễm Hạnh		SVTH: Phạm Thế Vinh</a:t>
             </a:r>
           </a:p>
           <a:p>
@@ -4481,18 +4457,7 @@
                 <a:ea typeface="Calibri" panose="020F0502020204030204" pitchFamily="34" charset="0"/>
                 <a:cs typeface="Calibri" panose="020F0502020204030204" pitchFamily="34" charset="0"/>
               </a:rPr>
-              <a:t>Tính </a:t>
-            </a:r>
-            <a:r>
-              <a:rPr lang="vi-VN" sz="3600" b="1">
-                <a:solidFill>
-                  <a:srgbClr val="053484"/>
-                </a:solidFill>
-                <a:latin typeface="Calibri" panose="020F0502020204030204" pitchFamily="34" charset="0"/>
-                <a:ea typeface="Calibri" panose="020F0502020204030204" pitchFamily="34" charset="0"/>
-                <a:cs typeface="Calibri" panose="020F0502020204030204" pitchFamily="34" charset="0"/>
-              </a:rPr>
-              <a:t>cấp </a:t>
+              <a:t>Tính cấp </a:t>
             </a:r>
             <a:r>
               <a:rPr lang="vi-VN" sz="3600" b="1" smtClean="0">
@@ -4557,39 +4522,7 @@
                 <a:ea typeface="Calibri" panose="020F0502020204030204" pitchFamily="34" charset="0"/>
                 <a:cs typeface="Calibri" panose="020F0502020204030204" pitchFamily="34" charset="0"/>
               </a:rPr>
-              <a:t>Phương thức q</a:t>
-            </a:r>
-            <a:r>
-              <a:rPr lang="vi-VN" sz="2600" smtClean="0">
-                <a:latin typeface="Calibri" panose="020F0502020204030204" pitchFamily="34" charset="0"/>
-                <a:ea typeface="Calibri" panose="020F0502020204030204" pitchFamily="34" charset="0"/>
-                <a:cs typeface="Calibri" panose="020F0502020204030204" pitchFamily="34" charset="0"/>
-              </a:rPr>
-              <a:t>uản </a:t>
-            </a:r>
-            <a:r>
-              <a:rPr lang="vi-VN" sz="2600" smtClean="0">
-                <a:latin typeface="Calibri" panose="020F0502020204030204" pitchFamily="34" charset="0"/>
-                <a:ea typeface="Calibri" panose="020F0502020204030204" pitchFamily="34" charset="0"/>
-                <a:cs typeface="Calibri" panose="020F0502020204030204" pitchFamily="34" charset="0"/>
-              </a:rPr>
-              <a:t>lý </a:t>
-            </a:r>
-            <a:r>
-              <a:rPr lang="vi-VN" sz="2600" smtClean="0">
-                <a:latin typeface="Calibri" panose="020F0502020204030204" pitchFamily="34" charset="0"/>
-                <a:ea typeface="Calibri" panose="020F0502020204030204" pitchFamily="34" charset="0"/>
-                <a:cs typeface="Calibri" panose="020F0502020204030204" pitchFamily="34" charset="0"/>
-              </a:rPr>
-              <a:t>còn </a:t>
-            </a:r>
-            <a:r>
-              <a:rPr lang="vi-VN" sz="2600" smtClean="0">
-                <a:latin typeface="Calibri" panose="020F0502020204030204" pitchFamily="34" charset="0"/>
-                <a:ea typeface="Calibri" panose="020F0502020204030204" pitchFamily="34" charset="0"/>
-                <a:cs typeface="Calibri" panose="020F0502020204030204" pitchFamily="34" charset="0"/>
-              </a:rPr>
-              <a:t>thủ công, lưu trữ riêng lẻ, phân tán.  </a:t>
+              <a:t>Phương thức quản lý còn thủ công, lưu trữ riêng lẻ, phân tán.  </a:t>
             </a:r>
           </a:p>
           <a:p>
@@ -4794,18 +4727,7 @@
                 <a:ea typeface="Calibri" panose="020F0502020204030204" pitchFamily="34" charset="0"/>
                 <a:cs typeface="Calibri" panose="020F0502020204030204" pitchFamily="34" charset="0"/>
               </a:rPr>
-              <a:t>Mục tiêu </a:t>
-            </a:r>
-            <a:r>
-              <a:rPr lang="vi-VN" sz="3600" b="1">
-                <a:solidFill>
-                  <a:srgbClr val="053484"/>
-                </a:solidFill>
-                <a:latin typeface="Calibri" panose="020F0502020204030204" pitchFamily="34" charset="0"/>
-                <a:ea typeface="Calibri" panose="020F0502020204030204" pitchFamily="34" charset="0"/>
-                <a:cs typeface="Calibri" panose="020F0502020204030204" pitchFamily="34" charset="0"/>
-              </a:rPr>
-              <a:t>nghiên </a:t>
+              <a:t>Mục tiêu nghiên </a:t>
             </a:r>
             <a:r>
               <a:rPr lang="vi-VN" sz="3600" b="1" smtClean="0">
@@ -4870,7 +4792,7 @@
                 <a:ea typeface="Calibri" panose="020F0502020204030204" pitchFamily="34" charset="0"/>
                 <a:cs typeface="Calibri" panose="020F0502020204030204" pitchFamily="34" charset="0"/>
               </a:rPr>
-              <a:t>Xây </a:t>
+              <a:t>Xây dựng phần mềm quản lý tập </a:t>
             </a:r>
             <a:r>
               <a:rPr lang="vi-VN" sz="2600" smtClean="0">
@@ -4878,7 +4800,15 @@
                 <a:ea typeface="Calibri" panose="020F0502020204030204" pitchFamily="34" charset="0"/>
                 <a:cs typeface="Calibri" panose="020F0502020204030204" pitchFamily="34" charset="0"/>
               </a:rPr>
-              <a:t>dựng phần mềm quản lý tập trung hồ sơ, tiếp nhận và đánh giá.  </a:t>
+              <a:t>trung, </a:t>
+            </a:r>
+            <a:r>
+              <a:rPr lang="vi-VN" sz="2600" smtClean="0">
+                <a:latin typeface="Calibri" panose="020F0502020204030204" pitchFamily="34" charset="0"/>
+                <a:ea typeface="Calibri" panose="020F0502020204030204" pitchFamily="34" charset="0"/>
+                <a:cs typeface="Calibri" panose="020F0502020204030204" pitchFamily="34" charset="0"/>
+              </a:rPr>
+              <a:t>tiếp nhận và đánh giá.  </a:t>
             </a:r>
           </a:p>
           <a:p>
@@ -5144,6 +5074,107 @@
               </a:rPr>
               <a:t>Kỹ thuật N-grams</a:t>
             </a:r>
+          </a:p>
+          <a:p>
+            <a:pPr algn="just">
+              <a:lnSpc>
+                <a:spcPct val="125000"/>
+              </a:lnSpc>
+              <a:spcBef>
+                <a:spcPts val="300"/>
+              </a:spcBef>
+              <a:spcAft>
+                <a:spcPts val="300"/>
+              </a:spcAft>
+              <a:buFont typeface="Sitka Text Semibold" pitchFamily="2" charset="0"/>
+              <a:buChar char="-"/>
+            </a:pPr>
+            <a:r>
+              <a:rPr lang="vi-VN" sz="2600" smtClean="0">
+                <a:latin typeface="Calibri" panose="020F0502020204030204" pitchFamily="34" charset="0"/>
+                <a:ea typeface="Calibri" panose="020F0502020204030204" pitchFamily="34" charset="0"/>
+                <a:cs typeface="Calibri" panose="020F0502020204030204" pitchFamily="34" charset="0"/>
+              </a:rPr>
+              <a:t>Xử lý văn bản và tìm kiếm theo hướng ngữ nghĩa</a:t>
+            </a:r>
+          </a:p>
+          <a:p>
+            <a:pPr algn="just">
+              <a:lnSpc>
+                <a:spcPct val="125000"/>
+              </a:lnSpc>
+              <a:spcBef>
+                <a:spcPts val="300"/>
+              </a:spcBef>
+              <a:spcAft>
+                <a:spcPts val="300"/>
+              </a:spcAft>
+              <a:buFont typeface="Sitka Text Semibold" pitchFamily="2" charset="0"/>
+              <a:buChar char="-"/>
+            </a:pPr>
+            <a:r>
+              <a:rPr lang="vi-VN" sz="2600">
+                <a:latin typeface="Calibri" panose="020F0502020204030204" pitchFamily="34" charset="0"/>
+                <a:ea typeface="Calibri" panose="020F0502020204030204" pitchFamily="34" charset="0"/>
+                <a:cs typeface="Calibri" panose="020F0502020204030204" pitchFamily="34" charset="0"/>
+              </a:rPr>
+              <a:t>Nền tảng ASP.NET Core </a:t>
+            </a:r>
+            <a:r>
+              <a:rPr lang="vi-VN" sz="2600" smtClean="0">
+                <a:latin typeface="Calibri" panose="020F0502020204030204" pitchFamily="34" charset="0"/>
+                <a:ea typeface="Calibri" panose="020F0502020204030204" pitchFamily="34" charset="0"/>
+                <a:cs typeface="Calibri" panose="020F0502020204030204" pitchFamily="34" charset="0"/>
+              </a:rPr>
+              <a:t>MVC</a:t>
+            </a:r>
+            <a:r>
+              <a:rPr lang="vi-VN" sz="2600">
+                <a:latin typeface="Calibri" panose="020F0502020204030204" pitchFamily="34" charset="0"/>
+                <a:ea typeface="Calibri" panose="020F0502020204030204" pitchFamily="34" charset="0"/>
+                <a:cs typeface="Calibri" panose="020F0502020204030204" pitchFamily="34" charset="0"/>
+              </a:rPr>
+              <a:t> </a:t>
+            </a:r>
+            <a:r>
+              <a:rPr lang="vi-VN" sz="2600" smtClean="0">
+                <a:latin typeface="Calibri" panose="020F0502020204030204" pitchFamily="34" charset="0"/>
+                <a:ea typeface="Calibri" panose="020F0502020204030204" pitchFamily="34" charset="0"/>
+                <a:cs typeface="Calibri" panose="020F0502020204030204" pitchFamily="34" charset="0"/>
+              </a:rPr>
+              <a:t>với ngôn ngữ C#</a:t>
+            </a:r>
+          </a:p>
+          <a:p>
+            <a:pPr algn="just">
+              <a:lnSpc>
+                <a:spcPct val="125000"/>
+              </a:lnSpc>
+              <a:spcBef>
+                <a:spcPts val="300"/>
+              </a:spcBef>
+              <a:spcAft>
+                <a:spcPts val="300"/>
+              </a:spcAft>
+              <a:buFont typeface="Sitka Text Semibold" pitchFamily="2" charset="0"/>
+              <a:buChar char="-"/>
+            </a:pPr>
+            <a:r>
+              <a:rPr lang="vi-VN" sz="2600" smtClean="0">
+                <a:latin typeface="Calibri" panose="020F0502020204030204" pitchFamily="34" charset="0"/>
+                <a:ea typeface="Calibri" panose="020F0502020204030204" pitchFamily="34" charset="0"/>
+                <a:cs typeface="Calibri" panose="020F0502020204030204" pitchFamily="34" charset="0"/>
+              </a:rPr>
+              <a:t>Hệ quản trị cơ sở dữ </a:t>
+            </a:r>
+            <a:r>
+              <a:rPr lang="vi-VN" sz="2600" smtClean="0">
+                <a:latin typeface="Calibri" panose="020F0502020204030204" pitchFamily="34" charset="0"/>
+                <a:ea typeface="Calibri" panose="020F0502020204030204" pitchFamily="34" charset="0"/>
+                <a:cs typeface="Calibri" panose="020F0502020204030204" pitchFamily="34" charset="0"/>
+              </a:rPr>
+              <a:t>liệu Oracle</a:t>
+            </a:r>
             <a:endParaRPr lang="vi-VN" sz="2600" smtClean="0">
               <a:latin typeface="Calibri" panose="020F0502020204030204" pitchFamily="34" charset="0"/>
               <a:ea typeface="Calibri" panose="020F0502020204030204" pitchFamily="34" charset="0"/>
@@ -5165,119 +5196,13 @@
               <a:buChar char="-"/>
             </a:pPr>
             <a:r>
-              <a:rPr lang="vi-VN" sz="2600" smtClean="0">
-                <a:latin typeface="Calibri" panose="020F0502020204030204" pitchFamily="34" charset="0"/>
-                <a:ea typeface="Calibri" panose="020F0502020204030204" pitchFamily="34" charset="0"/>
-                <a:cs typeface="Calibri" panose="020F0502020204030204" pitchFamily="34" charset="0"/>
-              </a:rPr>
-              <a:t>Xử lý văn bản và tìm kiếm theo hướng ngữ nghĩa</a:t>
-            </a:r>
-          </a:p>
-          <a:p>
-            <a:pPr algn="just">
-              <a:lnSpc>
-                <a:spcPct val="125000"/>
-              </a:lnSpc>
-              <a:spcBef>
-                <a:spcPts val="300"/>
-              </a:spcBef>
-              <a:spcAft>
-                <a:spcPts val="300"/>
-              </a:spcAft>
-              <a:buFont typeface="Sitka Text Semibold" pitchFamily="2" charset="0"/>
-              <a:buChar char="-"/>
-            </a:pPr>
-            <a:r>
               <a:rPr lang="vi-VN" sz="2600">
                 <a:latin typeface="Calibri" panose="020F0502020204030204" pitchFamily="34" charset="0"/>
                 <a:ea typeface="Calibri" panose="020F0502020204030204" pitchFamily="34" charset="0"/>
                 <a:cs typeface="Calibri" panose="020F0502020204030204" pitchFamily="34" charset="0"/>
               </a:rPr>
-              <a:t>Nền tảng ASP.NET </a:t>
-            </a:r>
-            <a:r>
-              <a:rPr lang="vi-VN" sz="2600">
-                <a:latin typeface="Calibri" panose="020F0502020204030204" pitchFamily="34" charset="0"/>
-                <a:ea typeface="Calibri" panose="020F0502020204030204" pitchFamily="34" charset="0"/>
-                <a:cs typeface="Calibri" panose="020F0502020204030204" pitchFamily="34" charset="0"/>
-              </a:rPr>
-              <a:t>Core </a:t>
-            </a:r>
-            <a:r>
-              <a:rPr lang="vi-VN" sz="2600" smtClean="0">
-                <a:latin typeface="Calibri" panose="020F0502020204030204" pitchFamily="34" charset="0"/>
-                <a:ea typeface="Calibri" panose="020F0502020204030204" pitchFamily="34" charset="0"/>
-                <a:cs typeface="Calibri" panose="020F0502020204030204" pitchFamily="34" charset="0"/>
-              </a:rPr>
-              <a:t>MVC</a:t>
-            </a:r>
-            <a:r>
-              <a:rPr lang="vi-VN" sz="2600">
-                <a:latin typeface="Calibri" panose="020F0502020204030204" pitchFamily="34" charset="0"/>
-                <a:ea typeface="Calibri" panose="020F0502020204030204" pitchFamily="34" charset="0"/>
-                <a:cs typeface="Calibri" panose="020F0502020204030204" pitchFamily="34" charset="0"/>
-              </a:rPr>
-              <a:t> </a:t>
-            </a:r>
-            <a:r>
-              <a:rPr lang="vi-VN" sz="2600" smtClean="0">
-                <a:latin typeface="Calibri" panose="020F0502020204030204" pitchFamily="34" charset="0"/>
-                <a:ea typeface="Calibri" panose="020F0502020204030204" pitchFamily="34" charset="0"/>
-                <a:cs typeface="Calibri" panose="020F0502020204030204" pitchFamily="34" charset="0"/>
-              </a:rPr>
-              <a:t>với ngôn ngữ C#</a:t>
-            </a:r>
-          </a:p>
-          <a:p>
-            <a:pPr algn="just">
-              <a:lnSpc>
-                <a:spcPct val="125000"/>
-              </a:lnSpc>
-              <a:spcBef>
-                <a:spcPts val="300"/>
-              </a:spcBef>
-              <a:spcAft>
-                <a:spcPts val="300"/>
-              </a:spcAft>
-              <a:buFont typeface="Sitka Text Semibold" pitchFamily="2" charset="0"/>
-              <a:buChar char="-"/>
-            </a:pPr>
-            <a:r>
-              <a:rPr lang="vi-VN" sz="2600" smtClean="0">
-                <a:latin typeface="Calibri" panose="020F0502020204030204" pitchFamily="34" charset="0"/>
-                <a:ea typeface="Calibri" panose="020F0502020204030204" pitchFamily="34" charset="0"/>
-                <a:cs typeface="Calibri" panose="020F0502020204030204" pitchFamily="34" charset="0"/>
-              </a:rPr>
-              <a:t>Hệ quản trị cơ sở dữ Oracle</a:t>
-            </a:r>
-          </a:p>
-          <a:p>
-            <a:pPr algn="just">
-              <a:lnSpc>
-                <a:spcPct val="125000"/>
-              </a:lnSpc>
-              <a:spcBef>
-                <a:spcPts val="300"/>
-              </a:spcBef>
-              <a:spcAft>
-                <a:spcPts val="300"/>
-              </a:spcAft>
-              <a:buFont typeface="Sitka Text Semibold" pitchFamily="2" charset="0"/>
-              <a:buChar char="-"/>
-            </a:pPr>
-            <a:r>
-              <a:rPr lang="vi-VN" sz="2600">
-                <a:latin typeface="Calibri" panose="020F0502020204030204" pitchFamily="34" charset="0"/>
-                <a:ea typeface="Calibri" panose="020F0502020204030204" pitchFamily="34" charset="0"/>
-                <a:cs typeface="Calibri" panose="020F0502020204030204" pitchFamily="34" charset="0"/>
-              </a:rPr>
               <a:t>Tìm hiểu LLM và Generative AI</a:t>
             </a:r>
-            <a:endParaRPr lang="vi-VN" sz="2600">
-              <a:latin typeface="Calibri" panose="020F0502020204030204" pitchFamily="34" charset="0"/>
-              <a:ea typeface="Calibri" panose="020F0502020204030204" pitchFamily="34" charset="0"/>
-              <a:cs typeface="Calibri" panose="020F0502020204030204" pitchFamily="34" charset="0"/>
-            </a:endParaRPr>
           </a:p>
         </p:txBody>
       </p:sp>
@@ -5435,7 +5360,18 @@
                 <a:ea typeface="Calibri" panose="020F0502020204030204" pitchFamily="34" charset="0"/>
                 <a:cs typeface="Calibri" panose="020F0502020204030204" pitchFamily="34" charset="0"/>
               </a:rPr>
-              <a:t>Quy </a:t>
+              <a:t>Quy trình </a:t>
+            </a:r>
+            <a:r>
+              <a:rPr lang="vi-VN" sz="3600" b="1" smtClean="0">
+                <a:solidFill>
+                  <a:srgbClr val="053484"/>
+                </a:solidFill>
+                <a:latin typeface="Calibri" panose="020F0502020204030204" pitchFamily="34" charset="0"/>
+                <a:ea typeface="Calibri" panose="020F0502020204030204" pitchFamily="34" charset="0"/>
+                <a:cs typeface="Calibri" panose="020F0502020204030204" pitchFamily="34" charset="0"/>
+              </a:rPr>
+              <a:t>xử </a:t>
             </a:r>
             <a:r>
               <a:rPr lang="vi-VN" sz="3600" b="1">
@@ -5446,40 +5382,7 @@
                 <a:ea typeface="Calibri" panose="020F0502020204030204" pitchFamily="34" charset="0"/>
                 <a:cs typeface="Calibri" panose="020F0502020204030204" pitchFamily="34" charset="0"/>
               </a:rPr>
-              <a:t>trình </a:t>
-            </a:r>
-            <a:r>
-              <a:rPr lang="vi-VN" sz="3600" b="1" smtClean="0">
-                <a:solidFill>
-                  <a:srgbClr val="053484"/>
-                </a:solidFill>
-                <a:latin typeface="Calibri" panose="020F0502020204030204" pitchFamily="34" charset="0"/>
-                <a:ea typeface="Calibri" panose="020F0502020204030204" pitchFamily="34" charset="0"/>
-                <a:cs typeface="Calibri" panose="020F0502020204030204" pitchFamily="34" charset="0"/>
-              </a:rPr>
-              <a:t>xử </a:t>
-            </a:r>
-            <a:r>
-              <a:rPr lang="vi-VN" sz="3600" b="1">
-                <a:solidFill>
-                  <a:srgbClr val="053484"/>
-                </a:solidFill>
-                <a:latin typeface="Calibri" panose="020F0502020204030204" pitchFamily="34" charset="0"/>
-                <a:ea typeface="Calibri" panose="020F0502020204030204" pitchFamily="34" charset="0"/>
-                <a:cs typeface="Calibri" panose="020F0502020204030204" pitchFamily="34" charset="0"/>
-              </a:rPr>
-              <a:t>lý </a:t>
-            </a:r>
-            <a:r>
-              <a:rPr lang="vi-VN" sz="3600" b="1">
-                <a:solidFill>
-                  <a:srgbClr val="053484"/>
-                </a:solidFill>
-                <a:latin typeface="Calibri" panose="020F0502020204030204" pitchFamily="34" charset="0"/>
-                <a:ea typeface="Calibri" panose="020F0502020204030204" pitchFamily="34" charset="0"/>
-                <a:cs typeface="Calibri" panose="020F0502020204030204" pitchFamily="34" charset="0"/>
-              </a:rPr>
-              <a:t>sáng </a:t>
+              <a:t>lý sáng </a:t>
             </a:r>
             <a:r>
               <a:rPr lang="vi-VN" sz="3600" b="1" smtClean="0">
@@ -5592,11 +5495,6 @@
               </a:rPr>
               <a:t>Thành lập hội đồng</a:t>
             </a:r>
-            <a:endParaRPr lang="vi-VN" sz="2600" smtClean="0">
-              <a:latin typeface="Calibri" panose="020F0502020204030204" pitchFamily="34" charset="0"/>
-              <a:ea typeface="Calibri" panose="020F0502020204030204" pitchFamily="34" charset="0"/>
-              <a:cs typeface="Calibri" panose="020F0502020204030204" pitchFamily="34" charset="0"/>
-            </a:endParaRPr>
           </a:p>
           <a:p>
             <a:pPr marL="514350" indent="-514350" algn="just">
@@ -5998,6 +5896,19 @@
               </a:rPr>
               <a:t>Lưu trữ </a:t>
             </a:r>
+            <a:r>
+              <a:rPr lang="vi-VN" sz="2600" smtClean="0">
+                <a:latin typeface="Calibri" panose="020F0502020204030204" pitchFamily="34" charset="0"/>
+                <a:ea typeface="Calibri" panose="020F0502020204030204" pitchFamily="34" charset="0"/>
+                <a:cs typeface="Calibri" panose="020F0502020204030204" pitchFamily="34" charset="0"/>
+              </a:rPr>
+              <a:t>cụm từ</a:t>
+            </a:r>
+            <a:endParaRPr lang="vi-VN" sz="2600" smtClean="0">
+              <a:latin typeface="Calibri" panose="020F0502020204030204" pitchFamily="34" charset="0"/>
+              <a:ea typeface="Calibri" panose="020F0502020204030204" pitchFamily="34" charset="0"/>
+              <a:cs typeface="Calibri" panose="020F0502020204030204" pitchFamily="34" charset="0"/>
+            </a:endParaRPr>
           </a:p>
           <a:p>
             <a:pPr marL="514350" indent="-514350" algn="just">
@@ -6229,18 +6140,7 @@
                 <a:ea typeface="Calibri" panose="020F0502020204030204" pitchFamily="34" charset="0"/>
                 <a:cs typeface="Calibri" panose="020F0502020204030204" pitchFamily="34" charset="0"/>
               </a:rPr>
-              <a:t>Chức năng </a:t>
-            </a:r>
-            <a:r>
-              <a:rPr lang="vi-VN" sz="3600" b="1">
-                <a:solidFill>
-                  <a:srgbClr val="053484"/>
-                </a:solidFill>
-                <a:latin typeface="Calibri" panose="020F0502020204030204" pitchFamily="34" charset="0"/>
-                <a:ea typeface="Calibri" panose="020F0502020204030204" pitchFamily="34" charset="0"/>
-                <a:cs typeface="Calibri" panose="020F0502020204030204" pitchFamily="34" charset="0"/>
-              </a:rPr>
-              <a:t>hệ </a:t>
+              <a:t>Chức năng hệ </a:t>
             </a:r>
             <a:r>
               <a:rPr lang="vi-VN" sz="3600" b="1" smtClean="0">
@@ -6305,15 +6205,7 @@
                 <a:ea typeface="Calibri" panose="020F0502020204030204" pitchFamily="34" charset="0"/>
                 <a:cs typeface="Calibri" panose="020F0502020204030204" pitchFamily="34" charset="0"/>
               </a:rPr>
-              <a:t>Admin </a:t>
-            </a:r>
-            <a:r>
-              <a:rPr lang="vi-VN" sz="2600" smtClean="0">
-                <a:latin typeface="Calibri" panose="020F0502020204030204" pitchFamily="34" charset="0"/>
-                <a:ea typeface="Calibri" panose="020F0502020204030204" pitchFamily="34" charset="0"/>
-                <a:cs typeface="Calibri" panose="020F0502020204030204" pitchFamily="34" charset="0"/>
-              </a:rPr>
-              <a:t>tài khoản: Quản lý tài khoản người dùng </a:t>
+              <a:t>Admin tài khoản: Quản lý tài khoản người dùng </a:t>
             </a:r>
           </a:p>
           <a:p>
@@ -6336,23 +6228,7 @@
                 <a:ea typeface="Calibri" panose="020F0502020204030204" pitchFamily="34" charset="0"/>
                 <a:cs typeface="Calibri" panose="020F0502020204030204" pitchFamily="34" charset="0"/>
               </a:rPr>
-              <a:t>Ban giám đốc: Quản lý các danh </a:t>
-            </a:r>
-            <a:r>
-              <a:rPr lang="vi-VN" sz="2600" smtClean="0">
-                <a:latin typeface="Calibri" panose="020F0502020204030204" pitchFamily="34" charset="0"/>
-                <a:ea typeface="Calibri" panose="020F0502020204030204" pitchFamily="34" charset="0"/>
-                <a:cs typeface="Calibri" panose="020F0502020204030204" pitchFamily="34" charset="0"/>
-              </a:rPr>
-              <a:t>mục, sáng kiến, </a:t>
-            </a:r>
-            <a:r>
-              <a:rPr lang="vi-VN" sz="2600" smtClean="0">
-                <a:latin typeface="Calibri" panose="020F0502020204030204" pitchFamily="34" charset="0"/>
-                <a:ea typeface="Calibri" panose="020F0502020204030204" pitchFamily="34" charset="0"/>
-                <a:cs typeface="Calibri" panose="020F0502020204030204" pitchFamily="34" charset="0"/>
-              </a:rPr>
-              <a:t>hội đồng, xem thống kê.  </a:t>
+              <a:t>Ban giám đốc: Quản lý các danh mục, sáng kiến, hội đồng, xem thống kê.  </a:t>
             </a:r>
           </a:p>
           <a:p>
@@ -6398,23 +6274,7 @@
                 <a:ea typeface="Calibri" panose="020F0502020204030204" pitchFamily="34" charset="0"/>
                 <a:cs typeface="Calibri" panose="020F0502020204030204" pitchFamily="34" charset="0"/>
               </a:rPr>
-              <a:t>Hội đồng: Đánh </a:t>
-            </a:r>
-            <a:r>
-              <a:rPr lang="vi-VN" sz="2600" smtClean="0">
-                <a:latin typeface="Calibri" panose="020F0502020204030204" pitchFamily="34" charset="0"/>
-                <a:ea typeface="Calibri" panose="020F0502020204030204" pitchFamily="34" charset="0"/>
-                <a:cs typeface="Calibri" panose="020F0502020204030204" pitchFamily="34" charset="0"/>
-              </a:rPr>
-              <a:t>giá sáng </a:t>
-            </a:r>
-            <a:r>
-              <a:rPr lang="vi-VN" sz="2600" smtClean="0">
-                <a:latin typeface="Calibri" panose="020F0502020204030204" pitchFamily="34" charset="0"/>
-                <a:ea typeface="Calibri" panose="020F0502020204030204" pitchFamily="34" charset="0"/>
-                <a:cs typeface="Calibri" panose="020F0502020204030204" pitchFamily="34" charset="0"/>
-              </a:rPr>
-              <a:t>kiến.  </a:t>
+              <a:t>Hội đồng: Đánh giá sáng kiến.  </a:t>
             </a:r>
           </a:p>
           <a:p>
@@ -6658,15 +6518,7 @@
                 <a:ea typeface="Calibri" panose="020F0502020204030204" pitchFamily="34" charset="0"/>
                 <a:cs typeface="Calibri" panose="020F0502020204030204" pitchFamily="34" charset="0"/>
               </a:rPr>
-              <a:t>quản lý sáng </a:t>
-            </a:r>
-            <a:r>
-              <a:rPr lang="vi-VN" sz="2600">
-                <a:latin typeface="Calibri" panose="020F0502020204030204" pitchFamily="34" charset="0"/>
-                <a:ea typeface="Calibri" panose="020F0502020204030204" pitchFamily="34" charset="0"/>
-                <a:cs typeface="Calibri" panose="020F0502020204030204" pitchFamily="34" charset="0"/>
-              </a:rPr>
-              <a:t>kiến </a:t>
+              <a:t>quản lý sáng kiến </a:t>
             </a:r>
             <a:r>
               <a:rPr lang="vi-VN" sz="2600" smtClean="0">
@@ -6733,15 +6585,7 @@
                 <a:ea typeface="Calibri" panose="020F0502020204030204" pitchFamily="34" charset="0"/>
                 <a:cs typeface="Calibri" panose="020F0502020204030204" pitchFamily="34" charset="0"/>
               </a:rPr>
-              <a:t>Ứng dụng kỹ thuật N-grams hỗ trợ tìm kiếm </a:t>
-            </a:r>
-            <a:r>
-              <a:rPr lang="vi-VN" sz="2600">
-                <a:latin typeface="Calibri" panose="020F0502020204030204" pitchFamily="34" charset="0"/>
-                <a:ea typeface="Calibri" panose="020F0502020204030204" pitchFamily="34" charset="0"/>
-                <a:cs typeface="Calibri" panose="020F0502020204030204" pitchFamily="34" charset="0"/>
-              </a:rPr>
-              <a:t>theo </a:t>
+              <a:t>Ứng dụng kỹ thuật N-grams hỗ trợ tìm kiếm theo </a:t>
             </a:r>
             <a:r>
               <a:rPr lang="vi-VN" sz="2600" smtClean="0">
@@ -6970,7 +6814,7 @@
                 <a:ea typeface="Calibri" panose="020F0502020204030204" pitchFamily="34" charset="0"/>
                 <a:cs typeface="Calibri" panose="020F0502020204030204" pitchFamily="34" charset="0"/>
               </a:rPr>
-              <a:t>Tìm </a:t>
+              <a:t>Tìm kiếm </a:t>
             </a:r>
             <a:r>
               <a:rPr lang="vi-VN" sz="2600" smtClean="0">
@@ -6978,7 +6822,15 @@
                 <a:ea typeface="Calibri" panose="020F0502020204030204" pitchFamily="34" charset="0"/>
                 <a:cs typeface="Calibri" panose="020F0502020204030204" pitchFamily="34" charset="0"/>
               </a:rPr>
-              <a:t>kiếm ngữ nghĩa còn đơn giản, chưa xử lý được các ngữ cảnh phức tạp.</a:t>
+              <a:t>còn </a:t>
+            </a:r>
+            <a:r>
+              <a:rPr lang="vi-VN" sz="2600" smtClean="0">
+                <a:latin typeface="Calibri" panose="020F0502020204030204" pitchFamily="34" charset="0"/>
+                <a:ea typeface="Calibri" panose="020F0502020204030204" pitchFamily="34" charset="0"/>
+                <a:cs typeface="Calibri" panose="020F0502020204030204" pitchFamily="34" charset="0"/>
+              </a:rPr>
+              <a:t>đơn giản, chưa xử lý được các ngữ cảnh phức tạp.</a:t>
             </a:r>
           </a:p>
           <a:p>
